--- a/DR/Защита_Костадин_final (1).pptx
+++ b/DR/Защита_Костадин_final (1).pptx
@@ -212,7 +212,7 @@
           </a:lstStyle>
           <a:p>
             <a:fld id="{EC69FA4D-EC0D-486A-9145-D675F628021A}" type="datetimeFigureOut">
-              <a:t>12.5.2026 г.</a:t>
+              <a:t>13.5.2026 г.</a:t>
             </a:fld>
             <a:endParaRPr lang="bg-BG"/>
           </a:p>
@@ -3502,15 +3502,50 @@
           <a:bodyPr/>
           <a:lstStyle/>
           <a:p>
-            <a:r>
-              <a:rPr lang="en-US">
-                <a:highlight>
-                  <a:srgbClr val="FFFFFF"/>
-                </a:highlight>
-              </a:rPr>
-              <a:t>Използва се frame differencing: Grayscale преобразуване, Gaussian blur (21×21), absdiff между кадри, thresholding и намиране на контури. Движещите се обекти се маркират с bounding boxes в реално време. Алгоритъмът е лек и работи ефективно дори на ограничени хардуерни ресурси.</a:t>
-            </a:r>
-            <a:endParaRPr lang="en-US">
+            <a:pPr marL="0" marR="0" indent="0" algn="l" defTabSz="914400" rtl="0" eaLnBrk="1" fontAlgn="auto" latinLnBrk="0" hangingPunct="1">
+              <a:lnSpc>
+                <a:spcPct val="100000"/>
+              </a:lnSpc>
+              <a:spcBef>
+                <a:spcPts val="0"/>
+              </a:spcBef>
+              <a:spcAft>
+                <a:spcPts val="0"/>
+              </a:spcAft>
+              <a:buClrTx/>
+              <a:buSzTx/>
+              <a:buFontTx/>
+              <a:buNone/>
+              <a:tabLst/>
+              <a:defRPr/>
+            </a:pPr>
+            <a:r>
+              <a:rPr lang="bg-BG" sz="1200" kern="1200" dirty="0" smtClean="0">
+                <a:solidFill>
+                  <a:schemeClr val="tx1"/>
+                </a:solidFill>
+                <a:effectLst/>
+                <a:latin typeface="+mn-lt"/>
+                <a:ea typeface="+mn-ea"/>
+                <a:cs typeface="+mn-cs"/>
+              </a:rPr>
+              <a:t>Frame differencing започва с преобразуване на кадъра в сива скала и Gaussian blur (21×21), за да се премахне шумът и да се ускори обработката. След това се изчислява абсолютната разлика между два последователни кадъра, резултатът се бинаризира чрез thresholding и се търсят контури по светлите области. </a:t>
+            </a:r>
+            <a:r>
+              <a:rPr lang="bg-BG" sz="1200" kern="1200" smtClean="0">
+                <a:solidFill>
+                  <a:schemeClr val="tx1"/>
+                </a:solidFill>
+                <a:effectLst/>
+                <a:latin typeface="+mn-lt"/>
+                <a:ea typeface="+mn-ea"/>
+                <a:cs typeface="+mn-cs"/>
+              </a:rPr>
+              <a:t>Накрая около достатъчно големите контури се чертаят bounding boxes в реалния кадър, маркирайки движещите се обекти — всичко това само с пикселна аритметика, без ML модели, което го прави изключително лек за слаб хардуер.</a:t>
+            </a:r>
+          </a:p>
+          <a:p>
+            <a:endParaRPr lang="en-US" dirty="0">
               <a:highlight>
                 <a:srgbClr val="606060"/>
               </a:highlight>
@@ -5383,6 +5418,15 @@
               </a:rPr>
               <a:t>Държавен изпит за придобиване на трета степен на професионална квалификация – част по теория на професията</a:t>
             </a:r>
+            <a:r>
+              <a:rPr lang="bg-BG" sz="1600" dirty="0">
+                <a:solidFill>
+                  <a:schemeClr val="bg1"/>
+                </a:solidFill>
+                <a:latin typeface="Century" panose="02040604050505020304" pitchFamily="18" charset="0"/>
+              </a:rPr>
+              <a:t/>
+            </a:r>
             <a:br>
               <a:rPr lang="bg-BG" sz="1600" dirty="0">
                 <a:solidFill>
@@ -5399,6 +5443,15 @@
                 <a:latin typeface="Century"/>
               </a:rPr>
               <a:t>по професия код 481030 „Приложен програмист”</a:t>
+            </a:r>
+            <a:r>
+              <a:rPr lang="bg-BG" sz="1600" dirty="0">
+                <a:solidFill>
+                  <a:schemeClr val="bg1"/>
+                </a:solidFill>
+                <a:latin typeface="Century" panose="02040604050505020304" pitchFamily="18" charset="0"/>
+              </a:rPr>
+              <a:t/>
             </a:r>
             <a:br>
               <a:rPr lang="bg-BG" sz="1600" dirty="0">

--- a/DR/Защита_Костадин_final (1).pptx
+++ b/DR/Защита_Костадин_final (1).pptx
@@ -3729,502 +3729,33 @@
           <a:bodyPr/>
           <a:lstStyle/>
           <a:p>
-            <a:r>
-              <a:rPr lang="en-US" dirty="0" err="1">
-                <a:highlight>
-                  <a:srgbClr val="FFFFFF"/>
-                </a:highlight>
-              </a:rPr>
-              <a:t>Видеопоток</a:t>
-            </a:r>
-            <a:r>
-              <a:rPr lang="en-US" dirty="0">
-                <a:highlight>
-                  <a:srgbClr val="FFFFFF"/>
-                </a:highlight>
-              </a:rPr>
-              <a:t> в </a:t>
-            </a:r>
-            <a:r>
-              <a:rPr lang="en-US" dirty="0" err="1">
-                <a:highlight>
-                  <a:srgbClr val="FFFFFF"/>
-                </a:highlight>
-              </a:rPr>
-              <a:t>реално</a:t>
-            </a:r>
-            <a:r>
-              <a:rPr lang="en-US" dirty="0">
-                <a:highlight>
-                  <a:srgbClr val="FFFFFF"/>
-                </a:highlight>
-              </a:rPr>
-              <a:t> </a:t>
-            </a:r>
-            <a:r>
-              <a:rPr lang="en-US" dirty="0" err="1">
-                <a:highlight>
-                  <a:srgbClr val="FFFFFF"/>
-                </a:highlight>
-              </a:rPr>
-              <a:t>време</a:t>
-            </a:r>
-            <a:r>
-              <a:rPr lang="en-US" dirty="0">
-                <a:highlight>
-                  <a:srgbClr val="FFFFFF"/>
-                </a:highlight>
-              </a:rPr>
-              <a:t>, </a:t>
-            </a:r>
-            <a:r>
-              <a:rPr lang="en-US" dirty="0" err="1">
-                <a:highlight>
-                  <a:srgbClr val="FFFFFF"/>
-                </a:highlight>
-              </a:rPr>
-              <a:t>детекция</a:t>
-            </a:r>
-            <a:r>
-              <a:rPr lang="en-US" dirty="0">
-                <a:highlight>
-                  <a:srgbClr val="FFFFFF"/>
-                </a:highlight>
-              </a:rPr>
-              <a:t> с bounding boxes, </a:t>
-            </a:r>
-            <a:r>
-              <a:rPr lang="en-US" dirty="0" err="1">
-                <a:highlight>
-                  <a:srgbClr val="FFFFFF"/>
-                </a:highlight>
-              </a:rPr>
-              <a:t>запис</a:t>
-            </a:r>
-            <a:r>
-              <a:rPr lang="en-US" dirty="0">
-                <a:highlight>
-                  <a:srgbClr val="FFFFFF"/>
-                </a:highlight>
-              </a:rPr>
-              <a:t> </a:t>
-            </a:r>
-            <a:r>
-              <a:rPr lang="en-US" dirty="0" err="1">
-                <a:highlight>
-                  <a:srgbClr val="FFFFFF"/>
-                </a:highlight>
-              </a:rPr>
-              <a:t>на</a:t>
-            </a:r>
-            <a:r>
-              <a:rPr lang="en-US" dirty="0">
-                <a:highlight>
-                  <a:srgbClr val="FFFFFF"/>
-                </a:highlight>
-              </a:rPr>
-              <a:t> </a:t>
-            </a:r>
-            <a:r>
-              <a:rPr lang="en-US" dirty="0" err="1">
-                <a:highlight>
-                  <a:srgbClr val="FFFFFF"/>
-                </a:highlight>
-              </a:rPr>
-              <a:t>снимки</a:t>
-            </a:r>
-            <a:r>
-              <a:rPr lang="en-US" dirty="0">
-                <a:highlight>
-                  <a:srgbClr val="FFFFFF"/>
-                </a:highlight>
-              </a:rPr>
-              <a:t>, </a:t>
-            </a:r>
-            <a:r>
-              <a:rPr lang="en-US" dirty="0" err="1">
-                <a:highlight>
-                  <a:srgbClr val="FFFFFF"/>
-                </a:highlight>
-              </a:rPr>
-              <a:t>логване</a:t>
-            </a:r>
-            <a:r>
-              <a:rPr lang="en-US" dirty="0">
-                <a:highlight>
-                  <a:srgbClr val="FFFFFF"/>
-                </a:highlight>
-              </a:rPr>
-              <a:t> </a:t>
-            </a:r>
-            <a:r>
-              <a:rPr lang="en-US" dirty="0" err="1">
-                <a:highlight>
-                  <a:srgbClr val="FFFFFF"/>
-                </a:highlight>
-              </a:rPr>
-              <a:t>на</a:t>
-            </a:r>
-            <a:r>
-              <a:rPr lang="en-US" dirty="0">
-                <a:highlight>
-                  <a:srgbClr val="FFFFFF"/>
-                </a:highlight>
-              </a:rPr>
-              <a:t> </a:t>
-            </a:r>
-            <a:r>
-              <a:rPr lang="en-US" dirty="0" err="1">
-                <a:highlight>
-                  <a:srgbClr val="FFFFFF"/>
-                </a:highlight>
-              </a:rPr>
-              <a:t>събития</a:t>
-            </a:r>
-            <a:r>
-              <a:rPr lang="en-US" dirty="0">
-                <a:highlight>
-                  <a:srgbClr val="FFFFFF"/>
-                </a:highlight>
-              </a:rPr>
-              <a:t>, </a:t>
-            </a:r>
-            <a:r>
-              <a:rPr lang="en-US" dirty="0" err="1">
-                <a:highlight>
-                  <a:srgbClr val="FFFFFF"/>
-                </a:highlight>
-              </a:rPr>
-              <a:t>управление</a:t>
-            </a:r>
-            <a:r>
-              <a:rPr lang="en-US" dirty="0">
-                <a:highlight>
-                  <a:srgbClr val="FFFFFF"/>
-                </a:highlight>
-              </a:rPr>
-              <a:t> </a:t>
-            </a:r>
-            <a:r>
-              <a:rPr lang="en-US" dirty="0" err="1">
-                <a:highlight>
-                  <a:srgbClr val="FFFFFF"/>
-                </a:highlight>
-              </a:rPr>
-              <a:t>на</a:t>
-            </a:r>
-            <a:r>
-              <a:rPr lang="en-US" dirty="0">
-                <a:highlight>
-                  <a:srgbClr val="FFFFFF"/>
-                </a:highlight>
-              </a:rPr>
-              <a:t> </a:t>
-            </a:r>
-            <a:r>
-              <a:rPr lang="en-US" dirty="0" err="1">
-                <a:highlight>
-                  <a:srgbClr val="FFFFFF"/>
-                </a:highlight>
-              </a:rPr>
-              <a:t>потребителски</a:t>
-            </a:r>
-            <a:r>
-              <a:rPr lang="en-US" dirty="0">
-                <a:highlight>
-                  <a:srgbClr val="FFFFFF"/>
-                </a:highlight>
-              </a:rPr>
-              <a:t> </a:t>
-            </a:r>
-            <a:r>
-              <a:rPr lang="en-US" dirty="0" err="1">
-                <a:highlight>
-                  <a:srgbClr val="FFFFFF"/>
-                </a:highlight>
-              </a:rPr>
-              <a:t>права</a:t>
-            </a:r>
-            <a:r>
-              <a:rPr lang="en-US" dirty="0">
-                <a:highlight>
-                  <a:srgbClr val="FFFFFF"/>
-                </a:highlight>
-              </a:rPr>
-              <a:t> и REST API </a:t>
-            </a:r>
-            <a:r>
-              <a:rPr lang="en-US" dirty="0" err="1">
-                <a:highlight>
-                  <a:srgbClr val="FFFFFF"/>
-                </a:highlight>
-              </a:rPr>
-              <a:t>за</a:t>
-            </a:r>
-            <a:r>
-              <a:rPr lang="en-US" dirty="0">
-                <a:highlight>
-                  <a:srgbClr val="FFFFFF"/>
-                </a:highlight>
-              </a:rPr>
-              <a:t> </a:t>
-            </a:r>
-            <a:r>
-              <a:rPr lang="en-US" dirty="0" err="1">
-                <a:highlight>
-                  <a:srgbClr val="FFFFFF"/>
-                </a:highlight>
-              </a:rPr>
-              <a:t>асинхронно</a:t>
-            </a:r>
-            <a:r>
-              <a:rPr lang="en-US" dirty="0">
-                <a:highlight>
-                  <a:srgbClr val="FFFFFF"/>
-                </a:highlight>
-              </a:rPr>
-              <a:t> </a:t>
-            </a:r>
-            <a:r>
-              <a:rPr lang="en-US" dirty="0" err="1">
-                <a:highlight>
-                  <a:srgbClr val="FFFFFF"/>
-                </a:highlight>
-              </a:rPr>
-              <a:t>управление</a:t>
-            </a:r>
-            <a:r>
-              <a:rPr lang="en-US" dirty="0">
-                <a:highlight>
-                  <a:srgbClr val="FFFFFF"/>
-                </a:highlight>
-              </a:rPr>
-              <a:t> </a:t>
-            </a:r>
-            <a:r>
-              <a:rPr lang="en-US" dirty="0" err="1">
-                <a:highlight>
-                  <a:srgbClr val="FFFFFF"/>
-                </a:highlight>
-              </a:rPr>
-              <a:t>на</a:t>
-            </a:r>
-            <a:r>
-              <a:rPr lang="en-US" dirty="0">
-                <a:highlight>
-                  <a:srgbClr val="FFFFFF"/>
-                </a:highlight>
-              </a:rPr>
-              <a:t> </a:t>
-            </a:r>
-            <a:r>
-              <a:rPr lang="en-US" dirty="0" err="1">
-                <a:highlight>
-                  <a:srgbClr val="FFFFFF"/>
-                </a:highlight>
-              </a:rPr>
-              <a:t>камерите</a:t>
-            </a:r>
-            <a:r>
-              <a:rPr lang="en-US" dirty="0">
-                <a:highlight>
-                  <a:srgbClr val="FFFFFF"/>
-                </a:highlight>
-              </a:rPr>
-              <a:t>. </a:t>
-            </a:r>
-            <a:r>
-              <a:rPr lang="en-US" dirty="0" err="1">
-                <a:highlight>
-                  <a:srgbClr val="FFFFFF"/>
-                </a:highlight>
-              </a:rPr>
-              <a:t>Всяка</a:t>
-            </a:r>
-            <a:r>
-              <a:rPr lang="en-US" dirty="0">
-                <a:highlight>
-                  <a:srgbClr val="FFFFFF"/>
-                </a:highlight>
-              </a:rPr>
-              <a:t> </a:t>
-            </a:r>
-            <a:r>
-              <a:rPr lang="en-US" dirty="0" err="1">
-                <a:highlight>
-                  <a:srgbClr val="FFFFFF"/>
-                </a:highlight>
-              </a:rPr>
-              <a:t>функционалност</a:t>
-            </a:r>
-            <a:r>
-              <a:rPr lang="en-US" dirty="0">
-                <a:highlight>
-                  <a:srgbClr val="FFFFFF"/>
-                </a:highlight>
-              </a:rPr>
-              <a:t> е </a:t>
-            </a:r>
-            <a:r>
-              <a:rPr lang="en-US" dirty="0" err="1">
-                <a:highlight>
-                  <a:srgbClr val="FFFFFF"/>
-                </a:highlight>
-              </a:rPr>
-              <a:t>реализирана</a:t>
-            </a:r>
-            <a:r>
-              <a:rPr lang="en-US" dirty="0">
-                <a:highlight>
-                  <a:srgbClr val="FFFFFF"/>
-                </a:highlight>
-              </a:rPr>
-              <a:t> с </a:t>
-            </a:r>
-            <a:r>
-              <a:rPr lang="en-US" dirty="0" err="1">
-                <a:highlight>
-                  <a:srgbClr val="FFFFFF"/>
-                </a:highlight>
-              </a:rPr>
-              <a:t>цел</a:t>
-            </a:r>
-            <a:r>
-              <a:rPr lang="en-US" dirty="0">
-                <a:highlight>
-                  <a:srgbClr val="FFFFFF"/>
-                </a:highlight>
-              </a:rPr>
-              <a:t> </a:t>
-            </a:r>
-            <a:r>
-              <a:rPr lang="en-US" dirty="0" err="1">
-                <a:highlight>
-                  <a:srgbClr val="FFFFFF"/>
-                </a:highlight>
-              </a:rPr>
-              <a:t>осигуряване</a:t>
-            </a:r>
-            <a:r>
-              <a:rPr lang="en-US" dirty="0">
-                <a:highlight>
-                  <a:srgbClr val="FFFFFF"/>
-                </a:highlight>
-              </a:rPr>
-              <a:t> </a:t>
-            </a:r>
-            <a:r>
-              <a:rPr lang="en-US" dirty="0" err="1">
-                <a:highlight>
-                  <a:srgbClr val="FFFFFF"/>
-                </a:highlight>
-              </a:rPr>
-              <a:t>на</a:t>
-            </a:r>
-            <a:r>
-              <a:rPr lang="en-US" dirty="0">
-                <a:highlight>
-                  <a:srgbClr val="FFFFFF"/>
-                </a:highlight>
-              </a:rPr>
-              <a:t> </a:t>
-            </a:r>
-            <a:r>
-              <a:rPr lang="en-US" dirty="0" err="1">
-                <a:highlight>
-                  <a:srgbClr val="FFFFFF"/>
-                </a:highlight>
-              </a:rPr>
-              <a:t>надеждност</a:t>
-            </a:r>
-            <a:r>
-              <a:rPr lang="en-US" dirty="0">
-                <a:highlight>
-                  <a:srgbClr val="FFFFFF"/>
-                </a:highlight>
-              </a:rPr>
-              <a:t>, </a:t>
-            </a:r>
-            <a:r>
-              <a:rPr lang="en-US" dirty="0" err="1">
-                <a:highlight>
-                  <a:srgbClr val="FFFFFF"/>
-                </a:highlight>
-              </a:rPr>
-              <a:t>сигурност</a:t>
-            </a:r>
-            <a:r>
-              <a:rPr lang="en-US" dirty="0">
-                <a:highlight>
-                  <a:srgbClr val="FFFFFF"/>
-                </a:highlight>
-              </a:rPr>
-              <a:t> и </a:t>
-            </a:r>
-            <a:r>
-              <a:rPr lang="en-US" dirty="0" err="1">
-                <a:highlight>
-                  <a:srgbClr val="FFFFFF"/>
-                </a:highlight>
-              </a:rPr>
-              <a:t>удобство</a:t>
-            </a:r>
-            <a:r>
-              <a:rPr lang="en-US" dirty="0">
-                <a:highlight>
-                  <a:srgbClr val="FFFFFF"/>
-                </a:highlight>
-              </a:rPr>
-              <a:t> </a:t>
-            </a:r>
-            <a:r>
-              <a:rPr lang="en-US" dirty="0" err="1">
-                <a:highlight>
-                  <a:srgbClr val="FFFFFF"/>
-                </a:highlight>
-              </a:rPr>
-              <a:t>за</a:t>
-            </a:r>
-            <a:r>
-              <a:rPr lang="en-US" dirty="0">
-                <a:highlight>
-                  <a:srgbClr val="FFFFFF"/>
-                </a:highlight>
-              </a:rPr>
-              <a:t> </a:t>
-            </a:r>
-            <a:r>
-              <a:rPr lang="en-US" dirty="0" err="1">
-                <a:highlight>
-                  <a:srgbClr val="FFFFFF"/>
-                </a:highlight>
-              </a:rPr>
-              <a:t>крайния</a:t>
-            </a:r>
-            <a:r>
-              <a:rPr lang="en-US" dirty="0">
-                <a:highlight>
-                  <a:srgbClr val="FFFFFF"/>
-                </a:highlight>
-              </a:rPr>
-              <a:t> </a:t>
-            </a:r>
-            <a:r>
-              <a:rPr lang="en-US" dirty="0" err="1">
-                <a:highlight>
-                  <a:srgbClr val="FFFFFF"/>
-                </a:highlight>
-              </a:rPr>
-              <a:t>потребител</a:t>
-            </a:r>
-            <a:r>
-              <a:rPr lang="en-US" dirty="0">
-                <a:highlight>
-                  <a:srgbClr val="FFFFFF"/>
-                </a:highlight>
-              </a:rPr>
-              <a:t>.</a:t>
-            </a:r>
+            <a:pPr marL="0" marR="0" indent="0" algn="l" defTabSz="914400" rtl="0" eaLnBrk="1" fontAlgn="auto" latinLnBrk="0" hangingPunct="1">
+              <a:lnSpc>
+                <a:spcPct val="100000"/>
+              </a:lnSpc>
+              <a:spcBef>
+                <a:spcPts val="0"/>
+              </a:spcBef>
+              <a:spcAft>
+                <a:spcPts val="0"/>
+              </a:spcAft>
+              <a:buClrTx/>
+              <a:buSzTx/>
+              <a:buFontTx/>
+              <a:buNone/>
+              <a:tabLst/>
+              <a:defRPr/>
+            </a:pPr>
+            <a:r>
+              <a:rPr lang="ru-RU" dirty="0" smtClean="0"/>
+              <a:t>Системата предава видео на живо и автоматично засича движещи се обекти, като ги маркира с правоъгълници. При засичане се записва снимка и събитието се логва за по-късен преглед. </a:t>
+            </a:r>
+            <a:r>
+              <a:rPr lang="ru-RU" smtClean="0"/>
+              <a:t>Достъпът е контролиран чрез потребителски права, а камерите могат да се управляват дистанционно през REST API, който обработва заявките асинхронно — така системата остава отзивчива дори при много едновременни команди.</a:t>
+            </a:r>
+          </a:p>
+          <a:p>
             <a:endParaRPr lang="en-US" dirty="0">
               <a:highlight>
                 <a:srgbClr val="606060"/>

--- a/DR/Защита_Костадин_final (1).pptx
+++ b/DR/Защита_Костадин_final (1).pptx
@@ -987,20 +987,20 @@
               <a:t> </a:t>
             </a:r>
             <a:r>
-              <a:rPr lang="en-US" dirty="0" err="1">
-                <a:highlight>
-                  <a:srgbClr val="FFFFFF"/>
-                </a:highlight>
-              </a:rPr>
-              <a:t>институции</a:t>
-            </a:r>
-            <a:r>
-              <a:rPr lang="en-US" dirty="0">
-                <a:highlight>
-                  <a:srgbClr val="FFFFFF"/>
-                </a:highlight>
-              </a:rPr>
-              <a:t>.</a:t>
+              <a:rPr lang="en-US" dirty="0" err="1" smtClean="0">
+                <a:highlight>
+                  <a:srgbClr val="FFFFFF"/>
+                </a:highlight>
+              </a:rPr>
+              <a:t>институц</a:t>
+            </a:r>
+            <a:r>
+              <a:rPr lang="bg-BG" dirty="0" smtClean="0">
+                <a:highlight>
+                  <a:srgbClr val="FFFFFF"/>
+                </a:highlight>
+              </a:rPr>
+              <a:t>ии.</a:t>
             </a:r>
             <a:endParaRPr lang="en-US" dirty="0">
               <a:highlight>
@@ -3752,8 +3752,13 @@
             </a:r>
             <a:r>
               <a:rPr lang="ru-RU" smtClean="0"/>
-              <a:t>Достъпът е контролиран чрез потребителски права, а камерите могат да се управляват дистанционно през REST API, който обработва заявките асинхронно — така системата остава отзивчива дори при много едновременни команди.</a:t>
-            </a:r>
+              <a:t>Достъпът е контролиран чрез потребителски права, а камерите могат да се управляват дистанционно през REST API, който обработва заявките асинхронно — така системата остава отзивчива дори при много едновременни </a:t>
+            </a:r>
+            <a:r>
+              <a:rPr lang="ru-RU" smtClean="0"/>
+              <a:t>команди.</a:t>
+            </a:r>
+            <a:endParaRPr lang="ru-RU" smtClean="0"/>
           </a:p>
           <a:p>
             <a:endParaRPr lang="en-US" dirty="0">

--- a/DR/Защита_Костадин_final (1).pptx
+++ b/DR/Защита_Костадин_final (1).pptx
@@ -3752,13 +3752,8 @@
             </a:r>
             <a:r>
               <a:rPr lang="ru-RU" smtClean="0"/>
-              <a:t>Достъпът е контролиран чрез потребителски права, а камерите могат да се управляват дистанционно през REST API, който обработва заявките асинхронно — така системата остава отзивчива дори при много едновременни </a:t>
-            </a:r>
-            <a:r>
-              <a:rPr lang="ru-RU" smtClean="0"/>
-              <a:t>команди.</a:t>
-            </a:r>
-            <a:endParaRPr lang="ru-RU" smtClean="0"/>
+              <a:t>Достъпът е контролиран чрез потребителски права, а камерите могат да се управляват дистанционно през REST API, който обработва заявките асинхронно — така системата остава отзивчива дори при много едновременни команди.</a:t>
+            </a:r>
           </a:p>
           <a:p>
             <a:endParaRPr lang="en-US" dirty="0">
@@ -3849,15 +3844,34 @@
           <a:bodyPr/>
           <a:lstStyle/>
           <a:p>
-            <a:r>
-              <a:rPr lang="en-US">
-                <a:highlight>
-                  <a:srgbClr val="FFFFFF"/>
-                </a:highlight>
-              </a:rPr>
-              <a:t>Backend: Django, OpenCV и Django ORM с модели CameraSource и MotionEvent в MariaDB. Frontend: Bootstrap 5 и AJAX за визуализация на потока и преглед на събитията. Двата слоя комуникират чрез REST API, което осигурява чисто разделение на отговорностите и лесна разширяемост.</a:t>
-            </a:r>
-            <a:endParaRPr lang="en-US">
+            <a:pPr marL="0" marR="0" indent="0" algn="l" defTabSz="914400" rtl="0" eaLnBrk="1" fontAlgn="auto" latinLnBrk="0" hangingPunct="1">
+              <a:lnSpc>
+                <a:spcPct val="100000"/>
+              </a:lnSpc>
+              <a:spcBef>
+                <a:spcPts val="0"/>
+              </a:spcBef>
+              <a:spcAft>
+                <a:spcPts val="0"/>
+              </a:spcAft>
+              <a:buClrTx/>
+              <a:buSzTx/>
+              <a:buFontTx/>
+              <a:buNone/>
+              <a:tabLst/>
+              <a:defRPr/>
+            </a:pPr>
+            <a:r>
+              <a:rPr lang="ru-RU" dirty="0" smtClean="0"/>
+              <a:t>За backend съм използвал Django заедно с OpenCV, а данните се пазят в MariaDB през Django ORM — имам два модела, единият за камерите, другият за засечените събития. За frontend съм избрал Bootstrap 5 с AJAX, за да може потокът и събитията да се виждат на живо без презареждане. </a:t>
+            </a:r>
+            <a:r>
+              <a:rPr lang="ru-RU" smtClean="0"/>
+              <a:t>Двата слоя говорят помежду си само през REST API, което ги прави независими и лесни за надграждане.</a:t>
+            </a:r>
+          </a:p>
+          <a:p>
+            <a:endParaRPr lang="en-US" dirty="0">
               <a:highlight>
                 <a:srgbClr val="606060"/>
               </a:highlight>

--- a/DR/Защита_Костадин_final (1).pptx
+++ b/DR/Защита_Костадин_final (1).pptx
@@ -1918,414 +1918,33 @@
           <a:bodyPr/>
           <a:lstStyle/>
           <a:p>
-            <a:r>
-              <a:rPr lang="en-US" dirty="0">
-                <a:highlight>
-                  <a:srgbClr val="FFFFFF"/>
-                </a:highlight>
-              </a:rPr>
-              <a:t>Разработване </a:t>
-            </a:r>
-            <a:r>
-              <a:rPr lang="en-US" dirty="0" err="1">
-                <a:highlight>
-                  <a:srgbClr val="FFFFFF"/>
-                </a:highlight>
-              </a:rPr>
-              <a:t>на</a:t>
-            </a:r>
-            <a:r>
-              <a:rPr lang="en-US" dirty="0">
-                <a:highlight>
-                  <a:srgbClr val="FFFFFF"/>
-                </a:highlight>
-              </a:rPr>
-              <a:t> </a:t>
-            </a:r>
-            <a:r>
-              <a:rPr lang="en-US" dirty="0" err="1">
-                <a:highlight>
-                  <a:srgbClr val="FFFFFF"/>
-                </a:highlight>
-              </a:rPr>
-              <a:t>уеб</a:t>
-            </a:r>
-            <a:r>
-              <a:rPr lang="en-US" dirty="0">
-                <a:highlight>
-                  <a:srgbClr val="FFFFFF"/>
-                </a:highlight>
-              </a:rPr>
-              <a:t> </a:t>
-            </a:r>
-            <a:r>
-              <a:rPr lang="en-US" dirty="0" err="1">
-                <a:highlight>
-                  <a:srgbClr val="FFFFFF"/>
-                </a:highlight>
-              </a:rPr>
-              <a:t>система</a:t>
-            </a:r>
-            <a:r>
-              <a:rPr lang="en-US" dirty="0">
-                <a:highlight>
-                  <a:srgbClr val="FFFFFF"/>
-                </a:highlight>
-              </a:rPr>
-              <a:t> </a:t>
-            </a:r>
-            <a:r>
-              <a:rPr lang="en-US" dirty="0" err="1">
-                <a:highlight>
-                  <a:srgbClr val="FFFFFF"/>
-                </a:highlight>
-              </a:rPr>
-              <a:t>за</a:t>
-            </a:r>
-            <a:r>
-              <a:rPr lang="en-US" dirty="0">
-                <a:highlight>
-                  <a:srgbClr val="FFFFFF"/>
-                </a:highlight>
-              </a:rPr>
-              <a:t> </a:t>
-            </a:r>
-            <a:r>
-              <a:rPr lang="en-US" dirty="0" err="1">
-                <a:highlight>
-                  <a:srgbClr val="FFFFFF"/>
-                </a:highlight>
-              </a:rPr>
-              <a:t>видеонаблюдение</a:t>
-            </a:r>
-            <a:r>
-              <a:rPr lang="en-US" dirty="0">
-                <a:highlight>
-                  <a:srgbClr val="FFFFFF"/>
-                </a:highlight>
-              </a:rPr>
-              <a:t> с </a:t>
-            </a:r>
-            <a:r>
-              <a:rPr lang="en-US" dirty="0" err="1">
-                <a:highlight>
-                  <a:srgbClr val="FFFFFF"/>
-                </a:highlight>
-              </a:rPr>
-              <a:t>видеопоток</a:t>
-            </a:r>
-            <a:r>
-              <a:rPr lang="en-US" dirty="0">
-                <a:highlight>
-                  <a:srgbClr val="FFFFFF"/>
-                </a:highlight>
-              </a:rPr>
-              <a:t> в </a:t>
-            </a:r>
-            <a:r>
-              <a:rPr lang="en-US" dirty="0" err="1">
-                <a:highlight>
-                  <a:srgbClr val="FFFFFF"/>
-                </a:highlight>
-              </a:rPr>
-              <a:t>реално</a:t>
-            </a:r>
-            <a:r>
-              <a:rPr lang="en-US" dirty="0">
-                <a:highlight>
-                  <a:srgbClr val="FFFFFF"/>
-                </a:highlight>
-              </a:rPr>
-              <a:t> </a:t>
-            </a:r>
-            <a:r>
-              <a:rPr lang="en-US" dirty="0" err="1">
-                <a:highlight>
-                  <a:srgbClr val="FFFFFF"/>
-                </a:highlight>
-              </a:rPr>
-              <a:t>време</a:t>
-            </a:r>
-            <a:r>
-              <a:rPr lang="en-US" dirty="0">
-                <a:highlight>
-                  <a:srgbClr val="FFFFFF"/>
-                </a:highlight>
-              </a:rPr>
-              <a:t>, </a:t>
-            </a:r>
-            <a:r>
-              <a:rPr lang="en-US" dirty="0" err="1">
-                <a:highlight>
-                  <a:srgbClr val="FFFFFF"/>
-                </a:highlight>
-              </a:rPr>
-              <a:t>автоматична</a:t>
-            </a:r>
-            <a:r>
-              <a:rPr lang="en-US" dirty="0">
-                <a:highlight>
-                  <a:srgbClr val="FFFFFF"/>
-                </a:highlight>
-              </a:rPr>
-              <a:t> </a:t>
-            </a:r>
-            <a:r>
-              <a:rPr lang="en-US" dirty="0" err="1">
-                <a:highlight>
-                  <a:srgbClr val="FFFFFF"/>
-                </a:highlight>
-              </a:rPr>
-              <a:t>детекция</a:t>
-            </a:r>
-            <a:r>
-              <a:rPr lang="en-US" dirty="0">
-                <a:highlight>
-                  <a:srgbClr val="FFFFFF"/>
-                </a:highlight>
-              </a:rPr>
-              <a:t> </a:t>
-            </a:r>
-            <a:r>
-              <a:rPr lang="en-US" dirty="0" err="1">
-                <a:highlight>
-                  <a:srgbClr val="FFFFFF"/>
-                </a:highlight>
-              </a:rPr>
-              <a:t>на</a:t>
-            </a:r>
-            <a:r>
-              <a:rPr lang="en-US" dirty="0">
-                <a:highlight>
-                  <a:srgbClr val="FFFFFF"/>
-                </a:highlight>
-              </a:rPr>
-              <a:t> </a:t>
-            </a:r>
-            <a:r>
-              <a:rPr lang="en-US" dirty="0" err="1">
-                <a:highlight>
-                  <a:srgbClr val="FFFFFF"/>
-                </a:highlight>
-              </a:rPr>
-              <a:t>движение</a:t>
-            </a:r>
-            <a:r>
-              <a:rPr lang="en-US" dirty="0">
-                <a:highlight>
-                  <a:srgbClr val="FFFFFF"/>
-                </a:highlight>
-              </a:rPr>
-              <a:t> и </a:t>
-            </a:r>
-            <a:r>
-              <a:rPr lang="en-US" dirty="0" err="1">
-                <a:highlight>
-                  <a:srgbClr val="FFFFFF"/>
-                </a:highlight>
-              </a:rPr>
-              <a:t>съобразеност</a:t>
-            </a:r>
-            <a:r>
-              <a:rPr lang="en-US" dirty="0">
-                <a:highlight>
-                  <a:srgbClr val="FFFFFF"/>
-                </a:highlight>
-              </a:rPr>
-              <a:t> с GDPR. Системата </a:t>
-            </a:r>
-            <a:r>
-              <a:rPr lang="en-US" dirty="0" err="1">
-                <a:highlight>
-                  <a:srgbClr val="FFFFFF"/>
-                </a:highlight>
-              </a:rPr>
-              <a:t>трябва</a:t>
-            </a:r>
-            <a:r>
-              <a:rPr lang="en-US" dirty="0">
-                <a:highlight>
-                  <a:srgbClr val="FFFFFF"/>
-                </a:highlight>
-              </a:rPr>
-              <a:t> </a:t>
-            </a:r>
-            <a:r>
-              <a:rPr lang="en-US" dirty="0" err="1">
-                <a:highlight>
-                  <a:srgbClr val="FFFFFF"/>
-                </a:highlight>
-              </a:rPr>
-              <a:t>да</a:t>
-            </a:r>
-            <a:r>
-              <a:rPr lang="en-US" dirty="0">
-                <a:highlight>
-                  <a:srgbClr val="FFFFFF"/>
-                </a:highlight>
-              </a:rPr>
-              <a:t> </a:t>
-            </a:r>
-            <a:r>
-              <a:rPr lang="en-US" dirty="0" err="1">
-                <a:highlight>
-                  <a:srgbClr val="FFFFFF"/>
-                </a:highlight>
-              </a:rPr>
-              <a:t>бъде</a:t>
-            </a:r>
-            <a:r>
-              <a:rPr lang="en-US" dirty="0">
-                <a:highlight>
-                  <a:srgbClr val="FFFFFF"/>
-                </a:highlight>
-              </a:rPr>
-              <a:t> </a:t>
-            </a:r>
-            <a:r>
-              <a:rPr lang="en-US" dirty="0" err="1">
-                <a:highlight>
-                  <a:srgbClr val="FFFFFF"/>
-                </a:highlight>
-              </a:rPr>
-              <a:t>достъпна</a:t>
-            </a:r>
-            <a:r>
-              <a:rPr lang="en-US" dirty="0">
-                <a:highlight>
-                  <a:srgbClr val="FFFFFF"/>
-                </a:highlight>
-              </a:rPr>
-              <a:t> и </a:t>
-            </a:r>
-            <a:r>
-              <a:rPr lang="en-US" dirty="0" err="1">
-                <a:highlight>
-                  <a:srgbClr val="FFFFFF"/>
-                </a:highlight>
-              </a:rPr>
-              <a:t>напълно</a:t>
-            </a:r>
-            <a:r>
-              <a:rPr lang="en-US" dirty="0">
-                <a:highlight>
-                  <a:srgbClr val="FFFFFF"/>
-                </a:highlight>
-              </a:rPr>
-              <a:t> </a:t>
-            </a:r>
-            <a:r>
-              <a:rPr lang="en-US" dirty="0" err="1">
-                <a:highlight>
-                  <a:srgbClr val="FFFFFF"/>
-                </a:highlight>
-              </a:rPr>
-              <a:t>функционална</a:t>
-            </a:r>
-            <a:r>
-              <a:rPr lang="en-US" dirty="0">
-                <a:highlight>
-                  <a:srgbClr val="FFFFFF"/>
-                </a:highlight>
-              </a:rPr>
-              <a:t> </a:t>
-            </a:r>
-            <a:r>
-              <a:rPr lang="en-US" dirty="0" err="1">
-                <a:highlight>
-                  <a:srgbClr val="FFFFFF"/>
-                </a:highlight>
-              </a:rPr>
-              <a:t>без</a:t>
-            </a:r>
-            <a:r>
-              <a:rPr lang="en-US" dirty="0">
-                <a:highlight>
-                  <a:srgbClr val="FFFFFF"/>
-                </a:highlight>
-              </a:rPr>
-              <a:t> </a:t>
-            </a:r>
-            <a:r>
-              <a:rPr lang="en-US" dirty="0" err="1">
-                <a:highlight>
-                  <a:srgbClr val="FFFFFF"/>
-                </a:highlight>
-              </a:rPr>
-              <a:t>инсталация</a:t>
-            </a:r>
-            <a:r>
-              <a:rPr lang="en-US" dirty="0">
-                <a:highlight>
-                  <a:srgbClr val="FFFFFF"/>
-                </a:highlight>
-              </a:rPr>
-              <a:t> </a:t>
-            </a:r>
-            <a:r>
-              <a:rPr lang="en-US" dirty="0" err="1">
-                <a:highlight>
-                  <a:srgbClr val="FFFFFF"/>
-                </a:highlight>
-              </a:rPr>
-              <a:t>на</a:t>
-            </a:r>
-            <a:r>
-              <a:rPr lang="en-US" dirty="0">
-                <a:highlight>
-                  <a:srgbClr val="FFFFFF"/>
-                </a:highlight>
-              </a:rPr>
-              <a:t> </a:t>
-            </a:r>
-            <a:r>
-              <a:rPr lang="en-US" dirty="0" err="1">
-                <a:highlight>
-                  <a:srgbClr val="FFFFFF"/>
-                </a:highlight>
-              </a:rPr>
-              <a:t>допълнителен</a:t>
-            </a:r>
-            <a:r>
-              <a:rPr lang="en-US" dirty="0">
-                <a:highlight>
-                  <a:srgbClr val="FFFFFF"/>
-                </a:highlight>
-              </a:rPr>
-              <a:t> </a:t>
-            </a:r>
-            <a:r>
-              <a:rPr lang="en-US" dirty="0" err="1">
-                <a:highlight>
-                  <a:srgbClr val="FFFFFF"/>
-                </a:highlight>
-              </a:rPr>
-              <a:t>клиентски</a:t>
-            </a:r>
-            <a:r>
-              <a:rPr lang="en-US" dirty="0">
-                <a:highlight>
-                  <a:srgbClr val="FFFFFF"/>
-                </a:highlight>
-              </a:rPr>
-              <a:t> </a:t>
-            </a:r>
-            <a:r>
-              <a:rPr lang="en-US" dirty="0" err="1">
-                <a:highlight>
-                  <a:srgbClr val="FFFFFF"/>
-                </a:highlight>
-              </a:rPr>
-              <a:t>софтуер</a:t>
-            </a:r>
-            <a:r>
-              <a:rPr lang="en-US" dirty="0">
-                <a:highlight>
-                  <a:srgbClr val="FFFFFF"/>
-                </a:highlight>
-              </a:rPr>
-              <a:t>.</a:t>
-            </a:r>
+            <a:pPr marL="0" marR="0" indent="0" algn="l" defTabSz="914400" rtl="0" eaLnBrk="1" fontAlgn="auto" latinLnBrk="0" hangingPunct="1">
+              <a:lnSpc>
+                <a:spcPct val="100000"/>
+              </a:lnSpc>
+              <a:spcBef>
+                <a:spcPts val="0"/>
+              </a:spcBef>
+              <a:spcAft>
+                <a:spcPts val="0"/>
+              </a:spcAft>
+              <a:buClrTx/>
+              <a:buSzTx/>
+              <a:buFontTx/>
+              <a:buNone/>
+              <a:tabLst/>
+              <a:defRPr/>
+            </a:pPr>
+            <a:r>
+              <a:rPr lang="ru-RU" dirty="0" smtClean="0"/>
+              <a:t>Системата е уеб базирана платформа за видеонаблюдение, която работи директно в браузъра — без инсталация на допълнителен софтуер. Тя предава видео в реално време, автоматично засича движение и уведомява при засечено събитие. </a:t>
+            </a:r>
+            <a:r>
+              <a:rPr lang="ru-RU" smtClean="0"/>
+              <a:t>Всичко е разработено при спазване на изискванията на GDPR — с автоматично замъгляване на лица и контролирано съхранение на записите.</a:t>
+            </a:r>
+          </a:p>
+          <a:p>
             <a:endParaRPr lang="en-US" dirty="0">
               <a:highlight>
                 <a:srgbClr val="606060"/>

--- a/DR/Защита_Костадин_final (1).pptx
+++ b/DR/Защита_Костадин_final (1).pptx
@@ -2641,398 +2641,33 @@
           <a:bodyPr/>
           <a:lstStyle/>
           <a:p>
-            <a:r>
-              <a:rPr lang="en-US" dirty="0">
-                <a:highlight>
-                  <a:srgbClr val="FFFFFF"/>
-                </a:highlight>
-              </a:rPr>
-              <a:t>След </a:t>
-            </a:r>
-            <a:r>
-              <a:rPr lang="en-US" dirty="0" err="1">
-                <a:highlight>
-                  <a:srgbClr val="FFFFFF"/>
-                </a:highlight>
-              </a:rPr>
-              <a:t>анализ</a:t>
-            </a:r>
-            <a:r>
-              <a:rPr lang="en-US" dirty="0">
-                <a:highlight>
-                  <a:srgbClr val="FFFFFF"/>
-                </a:highlight>
-              </a:rPr>
-              <a:t> </a:t>
-            </a:r>
-            <a:r>
-              <a:rPr lang="en-US" dirty="0" err="1">
-                <a:highlight>
-                  <a:srgbClr val="FFFFFF"/>
-                </a:highlight>
-              </a:rPr>
-              <a:t>на</a:t>
-            </a:r>
-            <a:r>
-              <a:rPr lang="en-US" dirty="0">
-                <a:highlight>
-                  <a:srgbClr val="FFFFFF"/>
-                </a:highlight>
-              </a:rPr>
-              <a:t> RTSP, HLS, DASH и WebRTC е </a:t>
-            </a:r>
-            <a:r>
-              <a:rPr lang="en-US" dirty="0" err="1">
-                <a:highlight>
-                  <a:srgbClr val="FFFFFF"/>
-                </a:highlight>
-              </a:rPr>
-              <a:t>избран</a:t>
-            </a:r>
-            <a:r>
-              <a:rPr lang="en-US" dirty="0">
-                <a:highlight>
-                  <a:srgbClr val="FFFFFF"/>
-                </a:highlight>
-              </a:rPr>
-              <a:t> MJPEG over HTTP — </a:t>
-            </a:r>
-            <a:r>
-              <a:rPr lang="en-US" dirty="0" err="1">
-                <a:highlight>
-                  <a:srgbClr val="FFFFFF"/>
-                </a:highlight>
-              </a:rPr>
-              <a:t>прост</a:t>
-            </a:r>
-            <a:r>
-              <a:rPr lang="en-US" dirty="0">
-                <a:highlight>
-                  <a:srgbClr val="FFFFFF"/>
-                </a:highlight>
-              </a:rPr>
-              <a:t> </a:t>
-            </a:r>
-            <a:r>
-              <a:rPr lang="en-US" dirty="0" err="1">
-                <a:highlight>
-                  <a:srgbClr val="FFFFFF"/>
-                </a:highlight>
-              </a:rPr>
-              <a:t>за</a:t>
-            </a:r>
-            <a:r>
-              <a:rPr lang="en-US" dirty="0">
-                <a:highlight>
-                  <a:srgbClr val="FFFFFF"/>
-                </a:highlight>
-              </a:rPr>
-              <a:t> </a:t>
-            </a:r>
-            <a:r>
-              <a:rPr lang="en-US" dirty="0" err="1">
-                <a:highlight>
-                  <a:srgbClr val="FFFFFF"/>
-                </a:highlight>
-              </a:rPr>
-              <a:t>реализация</a:t>
-            </a:r>
-            <a:r>
-              <a:rPr lang="en-US" dirty="0">
-                <a:highlight>
-                  <a:srgbClr val="FFFFFF"/>
-                </a:highlight>
-              </a:rPr>
-              <a:t> и </a:t>
-            </a:r>
-            <a:r>
-              <a:rPr lang="en-US" dirty="0" err="1">
-                <a:highlight>
-                  <a:srgbClr val="FFFFFF"/>
-                </a:highlight>
-              </a:rPr>
-              <a:t>нативно</a:t>
-            </a:r>
-            <a:r>
-              <a:rPr lang="en-US" dirty="0">
-                <a:highlight>
-                  <a:srgbClr val="FFFFFF"/>
-                </a:highlight>
-              </a:rPr>
-              <a:t> </a:t>
-            </a:r>
-            <a:r>
-              <a:rPr lang="en-US" dirty="0" err="1">
-                <a:highlight>
-                  <a:srgbClr val="FFFFFF"/>
-                </a:highlight>
-              </a:rPr>
-              <a:t>поддържан</a:t>
-            </a:r>
-            <a:r>
-              <a:rPr lang="en-US" dirty="0">
-                <a:highlight>
-                  <a:srgbClr val="FFFFFF"/>
-                </a:highlight>
-              </a:rPr>
-              <a:t> </a:t>
-            </a:r>
-            <a:r>
-              <a:rPr lang="en-US" dirty="0" err="1">
-                <a:highlight>
-                  <a:srgbClr val="FFFFFF"/>
-                </a:highlight>
-              </a:rPr>
-              <a:t>от</a:t>
-            </a:r>
-            <a:r>
-              <a:rPr lang="en-US" dirty="0">
-                <a:highlight>
-                  <a:srgbClr val="FFFFFF"/>
-                </a:highlight>
-              </a:rPr>
-              <a:t> </a:t>
-            </a:r>
-            <a:r>
-              <a:rPr lang="en-US" dirty="0" err="1">
-                <a:highlight>
-                  <a:srgbClr val="FFFFFF"/>
-                </a:highlight>
-              </a:rPr>
-              <a:t>всички</a:t>
-            </a:r>
-            <a:r>
-              <a:rPr lang="en-US" dirty="0">
-                <a:highlight>
-                  <a:srgbClr val="FFFFFF"/>
-                </a:highlight>
-              </a:rPr>
-              <a:t> </a:t>
-            </a:r>
-            <a:r>
-              <a:rPr lang="en-US" dirty="0" err="1">
-                <a:highlight>
-                  <a:srgbClr val="FFFFFF"/>
-                </a:highlight>
-              </a:rPr>
-              <a:t>браузъри</a:t>
-            </a:r>
-            <a:r>
-              <a:rPr lang="en-US" dirty="0">
-                <a:highlight>
-                  <a:srgbClr val="FFFFFF"/>
-                </a:highlight>
-              </a:rPr>
-              <a:t> </a:t>
-            </a:r>
-            <a:r>
-              <a:rPr lang="en-US" dirty="0" err="1">
-                <a:highlight>
-                  <a:srgbClr val="FFFFFF"/>
-                </a:highlight>
-              </a:rPr>
-              <a:t>без</a:t>
-            </a:r>
-            <a:r>
-              <a:rPr lang="en-US" dirty="0">
-                <a:highlight>
-                  <a:srgbClr val="FFFFFF"/>
-                </a:highlight>
-              </a:rPr>
-              <a:t> </a:t>
-            </a:r>
-            <a:r>
-              <a:rPr lang="en-US" dirty="0" err="1">
-                <a:highlight>
-                  <a:srgbClr val="FFFFFF"/>
-                </a:highlight>
-              </a:rPr>
-              <a:t>допълнителни</a:t>
-            </a:r>
-            <a:r>
-              <a:rPr lang="en-US" dirty="0">
-                <a:highlight>
-                  <a:srgbClr val="FFFFFF"/>
-                </a:highlight>
-              </a:rPr>
-              <a:t> </a:t>
-            </a:r>
-            <a:r>
-              <a:rPr lang="en-US" dirty="0" err="1">
-                <a:highlight>
-                  <a:srgbClr val="FFFFFF"/>
-                </a:highlight>
-              </a:rPr>
-              <a:t>зависимости</a:t>
-            </a:r>
-            <a:r>
-              <a:rPr lang="en-US" dirty="0">
-                <a:highlight>
-                  <a:srgbClr val="FFFFFF"/>
-                </a:highlight>
-              </a:rPr>
-              <a:t>. Това </a:t>
-            </a:r>
-            <a:r>
-              <a:rPr lang="en-US" dirty="0" err="1">
-                <a:highlight>
-                  <a:srgbClr val="FFFFFF"/>
-                </a:highlight>
-              </a:rPr>
-              <a:t>го</a:t>
-            </a:r>
-            <a:r>
-              <a:rPr lang="en-US" dirty="0">
-                <a:highlight>
-                  <a:srgbClr val="FFFFFF"/>
-                </a:highlight>
-              </a:rPr>
-              <a:t> </a:t>
-            </a:r>
-            <a:r>
-              <a:rPr lang="en-US" dirty="0" err="1">
-                <a:highlight>
-                  <a:srgbClr val="FFFFFF"/>
-                </a:highlight>
-              </a:rPr>
-              <a:t>прави</a:t>
-            </a:r>
-            <a:r>
-              <a:rPr lang="en-US" dirty="0">
-                <a:highlight>
-                  <a:srgbClr val="FFFFFF"/>
-                </a:highlight>
-              </a:rPr>
-              <a:t> </a:t>
-            </a:r>
-            <a:r>
-              <a:rPr lang="en-US" dirty="0" err="1">
-                <a:highlight>
-                  <a:srgbClr val="FFFFFF"/>
-                </a:highlight>
-              </a:rPr>
-              <a:t>оптималното</a:t>
-            </a:r>
-            <a:r>
-              <a:rPr lang="en-US" dirty="0">
-                <a:highlight>
-                  <a:srgbClr val="FFFFFF"/>
-                </a:highlight>
-              </a:rPr>
-              <a:t> </a:t>
-            </a:r>
-            <a:r>
-              <a:rPr lang="en-US" dirty="0" err="1">
-                <a:highlight>
-                  <a:srgbClr val="FFFFFF"/>
-                </a:highlight>
-              </a:rPr>
-              <a:t>решение</a:t>
-            </a:r>
-            <a:r>
-              <a:rPr lang="en-US" dirty="0">
-                <a:highlight>
-                  <a:srgbClr val="FFFFFF"/>
-                </a:highlight>
-              </a:rPr>
-              <a:t> </a:t>
-            </a:r>
-            <a:r>
-              <a:rPr lang="en-US" dirty="0" err="1">
-                <a:highlight>
-                  <a:srgbClr val="FFFFFF"/>
-                </a:highlight>
-              </a:rPr>
-              <a:t>за</a:t>
-            </a:r>
-            <a:r>
-              <a:rPr lang="en-US" dirty="0">
-                <a:highlight>
-                  <a:srgbClr val="FFFFFF"/>
-                </a:highlight>
-              </a:rPr>
-              <a:t> </a:t>
-            </a:r>
-            <a:r>
-              <a:rPr lang="en-US" dirty="0" err="1">
-                <a:highlight>
-                  <a:srgbClr val="FFFFFF"/>
-                </a:highlight>
-              </a:rPr>
-              <a:t>проект</a:t>
-            </a:r>
-            <a:r>
-              <a:rPr lang="en-US" dirty="0">
-                <a:highlight>
-                  <a:srgbClr val="FFFFFF"/>
-                </a:highlight>
-              </a:rPr>
-              <a:t> с </a:t>
-            </a:r>
-            <a:r>
-              <a:rPr lang="en-US" dirty="0" err="1">
-                <a:highlight>
-                  <a:srgbClr val="FFFFFF"/>
-                </a:highlight>
-              </a:rPr>
-              <a:t>приоритет</a:t>
-            </a:r>
-            <a:r>
-              <a:rPr lang="en-US" dirty="0">
-                <a:highlight>
-                  <a:srgbClr val="FFFFFF"/>
-                </a:highlight>
-              </a:rPr>
-              <a:t> </a:t>
-            </a:r>
-            <a:r>
-              <a:rPr lang="en-US" dirty="0" err="1">
-                <a:highlight>
-                  <a:srgbClr val="FFFFFF"/>
-                </a:highlight>
-              </a:rPr>
-              <a:t>на</a:t>
-            </a:r>
-            <a:r>
-              <a:rPr lang="en-US" dirty="0">
-                <a:highlight>
-                  <a:srgbClr val="FFFFFF"/>
-                </a:highlight>
-              </a:rPr>
-              <a:t> </a:t>
-            </a:r>
-            <a:r>
-              <a:rPr lang="en-US" dirty="0" err="1">
-                <a:highlight>
-                  <a:srgbClr val="FFFFFF"/>
-                </a:highlight>
-              </a:rPr>
-              <a:t>простотата</a:t>
-            </a:r>
-            <a:r>
-              <a:rPr lang="en-US" dirty="0">
-                <a:highlight>
-                  <a:srgbClr val="FFFFFF"/>
-                </a:highlight>
-              </a:rPr>
-              <a:t> и </a:t>
-            </a:r>
-            <a:r>
-              <a:rPr lang="en-US" dirty="0" err="1">
-                <a:highlight>
-                  <a:srgbClr val="FFFFFF"/>
-                </a:highlight>
-              </a:rPr>
-              <a:t>надеждността</a:t>
-            </a:r>
-            <a:r>
-              <a:rPr lang="en-US" dirty="0">
-                <a:highlight>
-                  <a:srgbClr val="FFFFFF"/>
-                </a:highlight>
-              </a:rPr>
-              <a:t>.</a:t>
-            </a:r>
+            <a:pPr marL="0" marR="0" indent="0" algn="l" defTabSz="914400" rtl="0" eaLnBrk="1" fontAlgn="auto" latinLnBrk="0" hangingPunct="1">
+              <a:lnSpc>
+                <a:spcPct val="100000"/>
+              </a:lnSpc>
+              <a:spcBef>
+                <a:spcPts val="0"/>
+              </a:spcBef>
+              <a:spcAft>
+                <a:spcPts val="0"/>
+              </a:spcAft>
+              <a:buClrTx/>
+              <a:buSzTx/>
+              <a:buFontTx/>
+              <a:buNone/>
+              <a:tabLst/>
+              <a:defRPr/>
+            </a:pPr>
+            <a:r>
+              <a:rPr lang="ru-RU" dirty="0" smtClean="0"/>
+              <a:t>Разгледахме няколко протокола — RTSP, HLS, DASH и WebRTC — и накрая избрахме MJPEG over HTTP. Причината е проста: той е лесен за реализация и работи нативно във всички браузъри, без да се налага да инсталираш каквото и да е допълнително. </a:t>
+            </a:r>
+            <a:r>
+              <a:rPr lang="ru-RU" smtClean="0"/>
+              <a:t>Това го прави най-подходящото решение за проект, където простотата и надеждността са на първо място.</a:t>
+            </a:r>
+          </a:p>
+          <a:p>
             <a:endParaRPr lang="en-US" dirty="0">
               <a:highlight>
                 <a:srgbClr val="606060"/>

--- a/DR/Защита_Костадин_final (1).pptx
+++ b/DR/Защита_Костадин_final (1).pptx
@@ -3001,12 +3001,28 @@
               <a:defRPr/>
             </a:pPr>
             <a:r>
-              <a:rPr lang="ru-RU" dirty="0" smtClean="0"/>
-              <a:t>Системата предава видео на живо и автоматично засича движещи се обекти, като ги маркира с правоъгълници. При засичане се записва снимка и събитието се логва за по-късен преглед. </a:t>
-            </a:r>
-            <a:r>
-              <a:rPr lang="ru-RU" smtClean="0"/>
-              <a:t>Достъпът е контролиран чрез потребителски права, а камерите могат да се управляват дистанционно през REST API, който обработва заявките асинхронно — така системата остава отзивчива дори при много едновременни команди.</a:t>
+              <a:rPr lang="bg-BG" sz="1200" kern="1200" dirty="0" smtClean="0">
+                <a:solidFill>
+                  <a:schemeClr val="tx1"/>
+                </a:solidFill>
+                <a:effectLst/>
+                <a:latin typeface="+mn-lt"/>
+                <a:ea typeface="+mn-ea"/>
+                <a:cs typeface="+mn-cs"/>
+              </a:rPr>
+              <a:t>Системата предава видео на живо от камерата и автоматично засича движение чрез алгоритъма frame differencing. Всяко събитие се записва в базата данни с времеви печат и снимка на кадъра, а достъпът до системата е защитен чрез потребителска аутентикация и управление на сесии. </a:t>
+            </a:r>
+            <a:r>
+              <a:rPr lang="bg-BG" sz="1200" kern="1200" smtClean="0">
+                <a:solidFill>
+                  <a:schemeClr val="tx1"/>
+                </a:solidFill>
+                <a:effectLst/>
+                <a:latin typeface="+mn-lt"/>
+                <a:ea typeface="+mn-ea"/>
+                <a:cs typeface="+mn-cs"/>
+              </a:rPr>
+              <a:t>Камерите могат да се управляват дистанционно през REST API, а целият интерфейс работи в браузъра без инсталация на допълнителен софтуер.</a:t>
             </a:r>
           </a:p>
           <a:p>

--- a/DR/Защита_Костадин_final (1).pptx
+++ b/DR/Защита_Костадин_final (1).pptx
@@ -212,7 +212,7 @@
           </a:lstStyle>
           <a:p>
             <a:fld id="{EC69FA4D-EC0D-486A-9145-D675F628021A}" type="datetimeFigureOut">
-              <a:t>13.5.2026 г.</a:t>
+              <a:t>19.5.2026 г.</a:t>
             </a:fld>
             <a:endParaRPr lang="bg-BG"/>
           </a:p>
@@ -1090,566 +1090,1114 @@
           <a:bodyPr/>
           <a:lstStyle/>
           <a:p>
-            <a:r>
-              <a:rPr lang="en-US" dirty="0" err="1">
-                <a:highlight>
-                  <a:srgbClr val="FFFFFF"/>
-                </a:highlight>
-              </a:rPr>
-              <a:t>Създадена</a:t>
-            </a:r>
-            <a:r>
-              <a:rPr lang="en-US" dirty="0">
-                <a:highlight>
-                  <a:srgbClr val="FFFFFF"/>
-                </a:highlight>
-              </a:rPr>
-              <a:t> е </a:t>
-            </a:r>
-            <a:r>
-              <a:rPr lang="en-US" dirty="0" err="1">
-                <a:highlight>
-                  <a:srgbClr val="FFFFFF"/>
-                </a:highlight>
+            <a:pPr marL="0" marR="0" indent="0" algn="l" defTabSz="914400" rtl="0" eaLnBrk="1" fontAlgn="auto" latinLnBrk="0" hangingPunct="1">
+              <a:lnSpc>
+                <a:spcPct val="100000"/>
+              </a:lnSpc>
+              <a:spcBef>
+                <a:spcPts val="0"/>
+              </a:spcBef>
+              <a:spcAft>
+                <a:spcPts val="0"/>
+              </a:spcAft>
+              <a:buClrTx/>
+              <a:buSzTx/>
+              <a:buFontTx/>
+              <a:buNone/>
+              <a:tabLst/>
+              <a:defRPr/>
+            </a:pPr>
+            <a:r>
+              <a:rPr lang="en-US" sz="1200" kern="1200" dirty="0" err="1" smtClean="0">
+                <a:solidFill>
+                  <a:schemeClr val="tx1"/>
+                </a:solidFill>
+                <a:effectLst/>
+                <a:latin typeface="+mn-lt"/>
+                <a:ea typeface="+mn-ea"/>
+                <a:cs typeface="+mn-cs"/>
+              </a:rPr>
+              <a:t>Разработих</a:t>
+            </a:r>
+            <a:r>
+              <a:rPr lang="en-US" sz="1200" kern="1200" dirty="0" smtClean="0">
+                <a:solidFill>
+                  <a:schemeClr val="tx1"/>
+                </a:solidFill>
+                <a:effectLst/>
+                <a:latin typeface="+mn-lt"/>
+                <a:ea typeface="+mn-ea"/>
+                <a:cs typeface="+mn-cs"/>
+              </a:rPr>
+              <a:t> </a:t>
+            </a:r>
+            <a:r>
+              <a:rPr lang="en-US" sz="1200" kern="1200" dirty="0" err="1" smtClean="0">
+                <a:solidFill>
+                  <a:schemeClr val="tx1"/>
+                </a:solidFill>
+                <a:effectLst/>
+                <a:latin typeface="+mn-lt"/>
+                <a:ea typeface="+mn-ea"/>
+                <a:cs typeface="+mn-cs"/>
               </a:rPr>
               <a:t>работеща</a:t>
             </a:r>
             <a:r>
-              <a:rPr lang="en-US" dirty="0">
-                <a:highlight>
-                  <a:srgbClr val="FFFFFF"/>
-                </a:highlight>
-              </a:rPr>
-              <a:t> </a:t>
-            </a:r>
-            <a:r>
-              <a:rPr lang="en-US" dirty="0" err="1">
-                <a:highlight>
-                  <a:srgbClr val="FFFFFF"/>
-                </a:highlight>
+              <a:rPr lang="en-US" sz="1200" kern="1200" dirty="0" smtClean="0">
+                <a:solidFill>
+                  <a:schemeClr val="tx1"/>
+                </a:solidFill>
+                <a:effectLst/>
+                <a:latin typeface="+mn-lt"/>
+                <a:ea typeface="+mn-ea"/>
+                <a:cs typeface="+mn-cs"/>
+              </a:rPr>
+              <a:t> </a:t>
+            </a:r>
+            <a:r>
+              <a:rPr lang="en-US" sz="1200" kern="1200" dirty="0" err="1" smtClean="0">
+                <a:solidFill>
+                  <a:schemeClr val="tx1"/>
+                </a:solidFill>
+                <a:effectLst/>
+                <a:latin typeface="+mn-lt"/>
+                <a:ea typeface="+mn-ea"/>
+                <a:cs typeface="+mn-cs"/>
               </a:rPr>
               <a:t>система</a:t>
             </a:r>
             <a:r>
-              <a:rPr lang="en-US" dirty="0">
-                <a:highlight>
-                  <a:srgbClr val="FFFFFF"/>
-                </a:highlight>
-              </a:rPr>
-              <a:t> </a:t>
-            </a:r>
-            <a:r>
-              <a:rPr lang="en-US" dirty="0" err="1">
-                <a:highlight>
-                  <a:srgbClr val="FFFFFF"/>
-                </a:highlight>
+              <a:rPr lang="en-US" sz="1200" kern="1200" dirty="0" smtClean="0">
+                <a:solidFill>
+                  <a:schemeClr val="tx1"/>
+                </a:solidFill>
+                <a:effectLst/>
+                <a:latin typeface="+mn-lt"/>
+                <a:ea typeface="+mn-ea"/>
+                <a:cs typeface="+mn-cs"/>
+              </a:rPr>
+              <a:t> </a:t>
+            </a:r>
+            <a:r>
+              <a:rPr lang="en-US" sz="1200" kern="1200" dirty="0" err="1" smtClean="0">
+                <a:solidFill>
+                  <a:schemeClr val="tx1"/>
+                </a:solidFill>
+                <a:effectLst/>
+                <a:latin typeface="+mn-lt"/>
+                <a:ea typeface="+mn-ea"/>
+                <a:cs typeface="+mn-cs"/>
               </a:rPr>
               <a:t>за</a:t>
             </a:r>
             <a:r>
-              <a:rPr lang="en-US" dirty="0">
-                <a:highlight>
-                  <a:srgbClr val="FFFFFF"/>
-                </a:highlight>
-              </a:rPr>
-              <a:t> </a:t>
-            </a:r>
-            <a:r>
-              <a:rPr lang="en-US" dirty="0" err="1">
-                <a:highlight>
-                  <a:srgbClr val="FFFFFF"/>
-                </a:highlight>
+              <a:rPr lang="en-US" sz="1200" kern="1200" dirty="0" smtClean="0">
+                <a:solidFill>
+                  <a:schemeClr val="tx1"/>
+                </a:solidFill>
+                <a:effectLst/>
+                <a:latin typeface="+mn-lt"/>
+                <a:ea typeface="+mn-ea"/>
+                <a:cs typeface="+mn-cs"/>
+              </a:rPr>
+              <a:t> </a:t>
+            </a:r>
+            <a:r>
+              <a:rPr lang="en-US" sz="1200" kern="1200" dirty="0" err="1" smtClean="0">
+                <a:solidFill>
+                  <a:schemeClr val="tx1"/>
+                </a:solidFill>
+                <a:effectLst/>
+                <a:latin typeface="+mn-lt"/>
+                <a:ea typeface="+mn-ea"/>
+                <a:cs typeface="+mn-cs"/>
               </a:rPr>
               <a:t>уеб-базирано</a:t>
             </a:r>
             <a:r>
-              <a:rPr lang="en-US" dirty="0">
-                <a:highlight>
-                  <a:srgbClr val="FFFFFF"/>
-                </a:highlight>
-              </a:rPr>
-              <a:t> </a:t>
-            </a:r>
-            <a:r>
-              <a:rPr lang="en-US" dirty="0" err="1">
-                <a:highlight>
-                  <a:srgbClr val="FFFFFF"/>
-                </a:highlight>
+              <a:rPr lang="en-US" sz="1200" kern="1200" dirty="0" smtClean="0">
+                <a:solidFill>
+                  <a:schemeClr val="tx1"/>
+                </a:solidFill>
+                <a:effectLst/>
+                <a:latin typeface="+mn-lt"/>
+                <a:ea typeface="+mn-ea"/>
+                <a:cs typeface="+mn-cs"/>
+              </a:rPr>
+              <a:t> </a:t>
+            </a:r>
+            <a:r>
+              <a:rPr lang="en-US" sz="1200" kern="1200" dirty="0" err="1" smtClean="0">
+                <a:solidFill>
+                  <a:schemeClr val="tx1"/>
+                </a:solidFill>
+                <a:effectLst/>
+                <a:latin typeface="+mn-lt"/>
+                <a:ea typeface="+mn-ea"/>
+                <a:cs typeface="+mn-cs"/>
               </a:rPr>
               <a:t>видеонаблюдение</a:t>
             </a:r>
             <a:r>
-              <a:rPr lang="en-US" dirty="0">
-                <a:highlight>
-                  <a:srgbClr val="FFFFFF"/>
-                </a:highlight>
-              </a:rPr>
-              <a:t>, </a:t>
-            </a:r>
-            <a:r>
-              <a:rPr lang="en-US" dirty="0" err="1">
-                <a:highlight>
-                  <a:srgbClr val="FFFFFF"/>
-                </a:highlight>
+              <a:rPr lang="en-US" sz="1200" kern="1200" dirty="0" smtClean="0">
+                <a:solidFill>
+                  <a:schemeClr val="tx1"/>
+                </a:solidFill>
+                <a:effectLst/>
+                <a:latin typeface="+mn-lt"/>
+                <a:ea typeface="+mn-ea"/>
+                <a:cs typeface="+mn-cs"/>
+              </a:rPr>
+              <a:t>, </a:t>
+            </a:r>
+            <a:r>
+              <a:rPr lang="en-US" sz="1200" kern="1200" dirty="0" err="1" smtClean="0">
+                <a:solidFill>
+                  <a:schemeClr val="tx1"/>
+                </a:solidFill>
+                <a:effectLst/>
+                <a:latin typeface="+mn-lt"/>
+                <a:ea typeface="+mn-ea"/>
+                <a:cs typeface="+mn-cs"/>
+              </a:rPr>
+              <a:t>която</a:t>
+            </a:r>
+            <a:r>
+              <a:rPr lang="en-US" sz="1200" kern="1200" dirty="0" smtClean="0">
+                <a:solidFill>
+                  <a:schemeClr val="tx1"/>
+                </a:solidFill>
+                <a:effectLst/>
+                <a:latin typeface="+mn-lt"/>
+                <a:ea typeface="+mn-ea"/>
+                <a:cs typeface="+mn-cs"/>
+              </a:rPr>
+              <a:t> е </a:t>
+            </a:r>
+            <a:r>
+              <a:rPr lang="en-US" sz="1200" kern="1200" dirty="0" err="1" smtClean="0">
+                <a:solidFill>
+                  <a:schemeClr val="tx1"/>
+                </a:solidFill>
+                <a:effectLst/>
+                <a:latin typeface="+mn-lt"/>
+                <a:ea typeface="+mn-ea"/>
+                <a:cs typeface="+mn-cs"/>
               </a:rPr>
               <a:t>достъпна</a:t>
             </a:r>
             <a:r>
-              <a:rPr lang="en-US" dirty="0">
-                <a:highlight>
-                  <a:srgbClr val="FFFFFF"/>
-                </a:highlight>
-              </a:rPr>
-              <a:t> </a:t>
-            </a:r>
-            <a:r>
-              <a:rPr lang="en-US" dirty="0" err="1">
-                <a:highlight>
-                  <a:srgbClr val="FFFFFF"/>
-                </a:highlight>
+              <a:rPr lang="en-US" sz="1200" kern="1200" dirty="0" smtClean="0">
+                <a:solidFill>
+                  <a:schemeClr val="tx1"/>
+                </a:solidFill>
+                <a:effectLst/>
+                <a:latin typeface="+mn-lt"/>
+                <a:ea typeface="+mn-ea"/>
+                <a:cs typeface="+mn-cs"/>
+              </a:rPr>
+              <a:t> </a:t>
+            </a:r>
+            <a:r>
+              <a:rPr lang="en-US" sz="1200" kern="1200" dirty="0" err="1" smtClean="0">
+                <a:solidFill>
+                  <a:schemeClr val="tx1"/>
+                </a:solidFill>
+                <a:effectLst/>
+                <a:latin typeface="+mn-lt"/>
+                <a:ea typeface="+mn-ea"/>
+                <a:cs typeface="+mn-cs"/>
               </a:rPr>
               <a:t>директно</a:t>
             </a:r>
             <a:r>
-              <a:rPr lang="en-US" dirty="0">
-                <a:highlight>
-                  <a:srgbClr val="FFFFFF"/>
-                </a:highlight>
-              </a:rPr>
-              <a:t> в </a:t>
-            </a:r>
-            <a:r>
-              <a:rPr lang="en-US" dirty="0" err="1">
-                <a:highlight>
-                  <a:srgbClr val="FFFFFF"/>
-                </a:highlight>
-              </a:rPr>
-              <a:t>браузъра</a:t>
-            </a:r>
-            <a:r>
-              <a:rPr lang="en-US" dirty="0">
-                <a:highlight>
-                  <a:srgbClr val="FFFFFF"/>
-                </a:highlight>
-              </a:rPr>
-              <a:t>. В </a:t>
-            </a:r>
-            <a:r>
-              <a:rPr lang="en-US" dirty="0" err="1">
-                <a:highlight>
-                  <a:srgbClr val="FFFFFF"/>
-                </a:highlight>
+              <a:rPr lang="en-US" sz="1200" kern="1200" dirty="0" smtClean="0">
+                <a:solidFill>
+                  <a:schemeClr val="tx1"/>
+                </a:solidFill>
+                <a:effectLst/>
+                <a:latin typeface="+mn-lt"/>
+                <a:ea typeface="+mn-ea"/>
+                <a:cs typeface="+mn-cs"/>
+              </a:rPr>
+              <a:t> </a:t>
+            </a:r>
+            <a:r>
+              <a:rPr lang="en-US" sz="1200" kern="1200" dirty="0" err="1" smtClean="0">
+                <a:solidFill>
+                  <a:schemeClr val="tx1"/>
+                </a:solidFill>
+                <a:effectLst/>
+                <a:latin typeface="+mn-lt"/>
+                <a:ea typeface="+mn-ea"/>
+                <a:cs typeface="+mn-cs"/>
+              </a:rPr>
+              <a:t>през</a:t>
+            </a:r>
+            <a:r>
+              <a:rPr lang="en-US" sz="1200" kern="1200" dirty="0" smtClean="0">
+                <a:solidFill>
+                  <a:schemeClr val="tx1"/>
+                </a:solidFill>
+                <a:effectLst/>
+                <a:latin typeface="+mn-lt"/>
+                <a:ea typeface="+mn-ea"/>
+                <a:cs typeface="+mn-cs"/>
+              </a:rPr>
+              <a:t> </a:t>
+            </a:r>
+            <a:r>
+              <a:rPr lang="en-US" sz="1200" kern="1200" dirty="0" err="1" smtClean="0">
+                <a:solidFill>
+                  <a:schemeClr val="tx1"/>
+                </a:solidFill>
+                <a:effectLst/>
+                <a:latin typeface="+mn-lt"/>
+                <a:ea typeface="+mn-ea"/>
+                <a:cs typeface="+mn-cs"/>
+              </a:rPr>
+              <a:t>браузър</a:t>
+            </a:r>
+            <a:r>
+              <a:rPr lang="en-US" sz="1200" kern="1200" dirty="0" smtClean="0">
+                <a:solidFill>
+                  <a:schemeClr val="tx1"/>
+                </a:solidFill>
+                <a:effectLst/>
+                <a:latin typeface="+mn-lt"/>
+                <a:ea typeface="+mn-ea"/>
+                <a:cs typeface="+mn-cs"/>
+              </a:rPr>
+              <a:t> </a:t>
+            </a:r>
+            <a:r>
+              <a:rPr lang="en-US" sz="1200" kern="1200" dirty="0" err="1" smtClean="0">
+                <a:solidFill>
+                  <a:schemeClr val="tx1"/>
+                </a:solidFill>
+                <a:effectLst/>
+                <a:latin typeface="+mn-lt"/>
+                <a:ea typeface="+mn-ea"/>
+                <a:cs typeface="+mn-cs"/>
+              </a:rPr>
+              <a:t>без</a:t>
+            </a:r>
+            <a:r>
+              <a:rPr lang="en-US" sz="1200" kern="1200" dirty="0" smtClean="0">
+                <a:solidFill>
+                  <a:schemeClr val="tx1"/>
+                </a:solidFill>
+                <a:effectLst/>
+                <a:latin typeface="+mn-lt"/>
+                <a:ea typeface="+mn-ea"/>
+                <a:cs typeface="+mn-cs"/>
+              </a:rPr>
+              <a:t> </a:t>
+            </a:r>
+            <a:r>
+              <a:rPr lang="en-US" sz="1200" kern="1200" dirty="0" err="1" smtClean="0">
+                <a:solidFill>
+                  <a:schemeClr val="tx1"/>
+                </a:solidFill>
+                <a:effectLst/>
+                <a:latin typeface="+mn-lt"/>
+                <a:ea typeface="+mn-ea"/>
+                <a:cs typeface="+mn-cs"/>
+              </a:rPr>
+              <a:t>допълнителен</a:t>
+            </a:r>
+            <a:r>
+              <a:rPr lang="en-US" sz="1200" kern="1200" dirty="0" smtClean="0">
+                <a:solidFill>
+                  <a:schemeClr val="tx1"/>
+                </a:solidFill>
+                <a:effectLst/>
+                <a:latin typeface="+mn-lt"/>
+                <a:ea typeface="+mn-ea"/>
+                <a:cs typeface="+mn-cs"/>
+              </a:rPr>
+              <a:t> </a:t>
+            </a:r>
+            <a:r>
+              <a:rPr lang="en-US" sz="1200" kern="1200" dirty="0" err="1" smtClean="0">
+                <a:solidFill>
+                  <a:schemeClr val="tx1"/>
+                </a:solidFill>
+                <a:effectLst/>
+                <a:latin typeface="+mn-lt"/>
+                <a:ea typeface="+mn-ea"/>
+                <a:cs typeface="+mn-cs"/>
+              </a:rPr>
+              <a:t>софтуер</a:t>
+            </a:r>
+            <a:r>
+              <a:rPr lang="en-US" sz="1200" kern="1200" dirty="0" smtClean="0">
+                <a:solidFill>
+                  <a:schemeClr val="tx1"/>
+                </a:solidFill>
+                <a:effectLst/>
+                <a:latin typeface="+mn-lt"/>
+                <a:ea typeface="+mn-ea"/>
+                <a:cs typeface="+mn-cs"/>
+              </a:rPr>
+              <a:t>. В </a:t>
+            </a:r>
+            <a:r>
+              <a:rPr lang="en-US" sz="1200" kern="1200" dirty="0" err="1" smtClean="0">
+                <a:solidFill>
+                  <a:schemeClr val="tx1"/>
+                </a:solidFill>
+                <a:effectLst/>
+                <a:latin typeface="+mn-lt"/>
+                <a:ea typeface="+mn-ea"/>
+                <a:cs typeface="+mn-cs"/>
               </a:rPr>
               <a:t>бъдеще</a:t>
             </a:r>
             <a:r>
-              <a:rPr lang="en-US" dirty="0">
-                <a:highlight>
-                  <a:srgbClr val="FFFFFF"/>
-                </a:highlight>
-              </a:rPr>
-              <a:t> </a:t>
-            </a:r>
-            <a:r>
-              <a:rPr lang="en-US" dirty="0" err="1">
-                <a:highlight>
-                  <a:srgbClr val="FFFFFF"/>
-                </a:highlight>
+              <a:rPr lang="en-US" sz="1200" kern="1200" dirty="0" smtClean="0">
+                <a:solidFill>
+                  <a:schemeClr val="tx1"/>
+                </a:solidFill>
+                <a:effectLst/>
+                <a:latin typeface="+mn-lt"/>
+                <a:ea typeface="+mn-ea"/>
+                <a:cs typeface="+mn-cs"/>
+              </a:rPr>
+              <a:t> </a:t>
+            </a:r>
+            <a:r>
+              <a:rPr lang="en-US" sz="1200" kern="1200" dirty="0" err="1" smtClean="0">
+                <a:solidFill>
+                  <a:schemeClr val="tx1"/>
+                </a:solidFill>
+                <a:effectLst/>
+                <a:latin typeface="+mn-lt"/>
+                <a:ea typeface="+mn-ea"/>
+                <a:cs typeface="+mn-cs"/>
+              </a:rPr>
+              <a:t>планирам</a:t>
+            </a:r>
+            <a:r>
+              <a:rPr lang="en-US" sz="1200" kern="1200" dirty="0" smtClean="0">
+                <a:solidFill>
+                  <a:schemeClr val="tx1"/>
+                </a:solidFill>
+                <a:effectLst/>
+                <a:latin typeface="+mn-lt"/>
+                <a:ea typeface="+mn-ea"/>
+                <a:cs typeface="+mn-cs"/>
+              </a:rPr>
+              <a:t> </a:t>
+            </a:r>
+            <a:r>
+              <a:rPr lang="en-US" sz="1200" kern="1200" dirty="0" err="1" smtClean="0">
+                <a:solidFill>
+                  <a:schemeClr val="tx1"/>
+                </a:solidFill>
+                <a:effectLst/>
+                <a:latin typeface="+mn-lt"/>
+                <a:ea typeface="+mn-ea"/>
+                <a:cs typeface="+mn-cs"/>
+              </a:rPr>
+              <a:t>да</a:t>
+            </a:r>
+            <a:r>
+              <a:rPr lang="en-US" sz="1200" kern="1200" dirty="0" smtClean="0">
+                <a:solidFill>
+                  <a:schemeClr val="tx1"/>
+                </a:solidFill>
+                <a:effectLst/>
+                <a:latin typeface="+mn-lt"/>
+                <a:ea typeface="+mn-ea"/>
+                <a:cs typeface="+mn-cs"/>
+              </a:rPr>
+              <a:t> я </a:t>
+            </a:r>
+            <a:r>
+              <a:rPr lang="en-US" sz="1200" kern="1200" dirty="0" err="1" smtClean="0">
+                <a:solidFill>
+                  <a:schemeClr val="tx1"/>
+                </a:solidFill>
+                <a:effectLst/>
+                <a:latin typeface="+mn-lt"/>
+                <a:ea typeface="+mn-ea"/>
+                <a:cs typeface="+mn-cs"/>
+              </a:rPr>
+              <a:t>разширя</a:t>
+            </a:r>
+            <a:r>
+              <a:rPr lang="en-US" sz="1200" kern="1200" dirty="0" smtClean="0">
+                <a:solidFill>
+                  <a:schemeClr val="tx1"/>
+                </a:solidFill>
+                <a:effectLst/>
+                <a:latin typeface="+mn-lt"/>
+                <a:ea typeface="+mn-ea"/>
+                <a:cs typeface="+mn-cs"/>
+              </a:rPr>
+              <a:t> с ML </a:t>
+            </a:r>
+            <a:r>
+              <a:rPr lang="en-US" sz="1200" kern="1200" dirty="0" err="1" smtClean="0">
+                <a:solidFill>
+                  <a:schemeClr val="tx1"/>
+                </a:solidFill>
+                <a:effectLst/>
+                <a:latin typeface="+mn-lt"/>
+                <a:ea typeface="+mn-ea"/>
+                <a:cs typeface="+mn-cs"/>
+              </a:rPr>
+              <a:t>детекция</a:t>
+            </a:r>
+            <a:r>
+              <a:rPr lang="en-US" sz="1200" kern="1200" dirty="0" smtClean="0">
+                <a:solidFill>
+                  <a:schemeClr val="tx1"/>
+                </a:solidFill>
+                <a:effectLst/>
+                <a:latin typeface="+mn-lt"/>
+                <a:ea typeface="+mn-ea"/>
+                <a:cs typeface="+mn-cs"/>
+              </a:rPr>
+              <a:t>, </a:t>
+            </a:r>
+            <a:r>
+              <a:rPr lang="en-US" sz="1200" kern="1200" dirty="0" err="1" smtClean="0">
+                <a:solidFill>
+                  <a:schemeClr val="tx1"/>
+                </a:solidFill>
+                <a:effectLst/>
+                <a:latin typeface="+mn-lt"/>
+                <a:ea typeface="+mn-ea"/>
+                <a:cs typeface="+mn-cs"/>
+              </a:rPr>
+              <a:t>WebRTC</a:t>
+            </a:r>
+            <a:r>
+              <a:rPr lang="en-US" sz="1200" kern="1200" dirty="0" smtClean="0">
+                <a:solidFill>
+                  <a:schemeClr val="tx1"/>
+                </a:solidFill>
+                <a:effectLst/>
+                <a:latin typeface="+mn-lt"/>
+                <a:ea typeface="+mn-ea"/>
+                <a:cs typeface="+mn-cs"/>
+              </a:rPr>
+              <a:t> и </a:t>
+            </a:r>
+            <a:r>
+              <a:rPr lang="en-US" sz="1200" kern="1200" dirty="0" err="1" smtClean="0">
+                <a:solidFill>
+                  <a:schemeClr val="tx1"/>
+                </a:solidFill>
+                <a:effectLst/>
+                <a:latin typeface="+mn-lt"/>
+                <a:ea typeface="+mn-ea"/>
+                <a:cs typeface="+mn-cs"/>
+              </a:rPr>
+              <a:t>поддръжка</a:t>
+            </a:r>
+            <a:r>
+              <a:rPr lang="en-US" sz="1200" kern="1200" dirty="0" smtClean="0">
+                <a:solidFill>
+                  <a:schemeClr val="tx1"/>
+                </a:solidFill>
+                <a:effectLst/>
+                <a:latin typeface="+mn-lt"/>
+                <a:ea typeface="+mn-ea"/>
+                <a:cs typeface="+mn-cs"/>
+              </a:rPr>
+              <a:t> </a:t>
+            </a:r>
+            <a:r>
+              <a:rPr lang="en-US" sz="1200" kern="1200" dirty="0" err="1" smtClean="0">
+                <a:solidFill>
+                  <a:schemeClr val="tx1"/>
+                </a:solidFill>
+                <a:effectLst/>
+                <a:latin typeface="+mn-lt"/>
+                <a:ea typeface="+mn-ea"/>
+                <a:cs typeface="+mn-cs"/>
+              </a:rPr>
+              <a:t>на</a:t>
+            </a:r>
+            <a:r>
+              <a:rPr lang="en-US" sz="1200" kern="1200" dirty="0" smtClean="0">
+                <a:solidFill>
+                  <a:schemeClr val="tx1"/>
+                </a:solidFill>
+                <a:effectLst/>
+                <a:latin typeface="+mn-lt"/>
+                <a:ea typeface="+mn-ea"/>
+                <a:cs typeface="+mn-cs"/>
+              </a:rPr>
+              <a:t> </a:t>
+            </a:r>
+            <a:r>
+              <a:rPr lang="en-US" sz="1200" kern="1200" dirty="0" err="1" smtClean="0">
+                <a:solidFill>
+                  <a:schemeClr val="tx1"/>
+                </a:solidFill>
+                <a:effectLst/>
+                <a:latin typeface="+mn-lt"/>
+                <a:ea typeface="+mn-ea"/>
+                <a:cs typeface="+mn-cs"/>
+              </a:rPr>
+              <a:t>множество</a:t>
+            </a:r>
+            <a:r>
+              <a:rPr lang="en-US" sz="1200" kern="1200" dirty="0" smtClean="0">
+                <a:solidFill>
+                  <a:schemeClr val="tx1"/>
+                </a:solidFill>
+                <a:effectLst/>
+                <a:latin typeface="+mn-lt"/>
+                <a:ea typeface="+mn-ea"/>
+                <a:cs typeface="+mn-cs"/>
+              </a:rPr>
+              <a:t> </a:t>
+            </a:r>
+            <a:r>
+              <a:rPr lang="en-US" sz="1200" kern="1200" dirty="0" err="1" smtClean="0">
+                <a:solidFill>
+                  <a:schemeClr val="tx1"/>
+                </a:solidFill>
+                <a:effectLst/>
+                <a:latin typeface="+mn-lt"/>
+                <a:ea typeface="+mn-ea"/>
+                <a:cs typeface="+mn-cs"/>
+              </a:rPr>
+              <a:t>камери</a:t>
+            </a:r>
+            <a:r>
+              <a:rPr lang="en-US" sz="1200" kern="1200" dirty="0" smtClean="0">
+                <a:solidFill>
+                  <a:schemeClr val="tx1"/>
+                </a:solidFill>
+                <a:effectLst/>
+                <a:latin typeface="+mn-lt"/>
+                <a:ea typeface="+mn-ea"/>
+                <a:cs typeface="+mn-cs"/>
+              </a:rPr>
+              <a:t> </a:t>
+            </a:r>
+            <a:r>
+              <a:rPr lang="en-US" sz="1200" kern="1200" dirty="0" err="1" smtClean="0">
+                <a:solidFill>
+                  <a:schemeClr val="tx1"/>
+                </a:solidFill>
+                <a:effectLst/>
+                <a:latin typeface="+mn-lt"/>
+                <a:ea typeface="+mn-ea"/>
+                <a:cs typeface="+mn-cs"/>
+              </a:rPr>
+              <a:t>едновременно</a:t>
+            </a:r>
+            <a:r>
+              <a:rPr lang="en-US" sz="1200" kern="1200" dirty="0" smtClean="0">
+                <a:solidFill>
+                  <a:schemeClr val="tx1"/>
+                </a:solidFill>
+                <a:effectLst/>
+                <a:latin typeface="+mn-lt"/>
+                <a:ea typeface="+mn-ea"/>
+                <a:cs typeface="+mn-cs"/>
+              </a:rPr>
+              <a:t>. </a:t>
+            </a:r>
+            <a:r>
+              <a:rPr lang="en-US" sz="1200" kern="1200" dirty="0" err="1" smtClean="0">
+                <a:solidFill>
+                  <a:schemeClr val="tx1"/>
+                </a:solidFill>
+                <a:effectLst/>
+                <a:latin typeface="+mn-lt"/>
+                <a:ea typeface="+mn-ea"/>
+                <a:cs typeface="+mn-cs"/>
+              </a:rPr>
+              <a:t>Смятам</a:t>
+            </a:r>
+            <a:r>
+              <a:rPr lang="en-US" sz="1200" kern="1200" dirty="0" smtClean="0">
+                <a:solidFill>
+                  <a:schemeClr val="tx1"/>
+                </a:solidFill>
+                <a:effectLst/>
+                <a:latin typeface="+mn-lt"/>
+                <a:ea typeface="+mn-ea"/>
+                <a:cs typeface="+mn-cs"/>
+              </a:rPr>
+              <a:t>, </a:t>
+            </a:r>
+            <a:r>
+              <a:rPr lang="en-US" sz="1200" kern="1200" dirty="0" err="1" smtClean="0">
+                <a:solidFill>
+                  <a:schemeClr val="tx1"/>
+                </a:solidFill>
+                <a:effectLst/>
+                <a:latin typeface="+mn-lt"/>
+                <a:ea typeface="+mn-ea"/>
+                <a:cs typeface="+mn-cs"/>
+              </a:rPr>
+              <a:t>че</a:t>
+            </a:r>
+            <a:r>
+              <a:rPr lang="en-US" sz="1200" kern="1200" dirty="0" smtClean="0">
+                <a:solidFill>
+                  <a:schemeClr val="tx1"/>
+                </a:solidFill>
+                <a:effectLst/>
+                <a:latin typeface="+mn-lt"/>
+                <a:ea typeface="+mn-ea"/>
+                <a:cs typeface="+mn-cs"/>
+              </a:rPr>
+              <a:t> </a:t>
+            </a:r>
+            <a:r>
+              <a:rPr lang="en-US" sz="1200" kern="1200" dirty="0" err="1" smtClean="0">
+                <a:solidFill>
+                  <a:schemeClr val="tx1"/>
+                </a:solidFill>
+                <a:effectLst/>
+                <a:latin typeface="+mn-lt"/>
+                <a:ea typeface="+mn-ea"/>
+                <a:cs typeface="+mn-cs"/>
+              </a:rPr>
+              <a:t>проектът</a:t>
+            </a:r>
+            <a:r>
+              <a:rPr lang="en-US" sz="1200" kern="1200" dirty="0" smtClean="0">
+                <a:solidFill>
+                  <a:schemeClr val="tx1"/>
+                </a:solidFill>
+                <a:effectLst/>
+                <a:latin typeface="+mn-lt"/>
+                <a:ea typeface="+mn-ea"/>
+                <a:cs typeface="+mn-cs"/>
+              </a:rPr>
+              <a:t> </a:t>
+            </a:r>
+            <a:r>
+              <a:rPr lang="en-US" sz="1200" kern="1200" dirty="0" err="1" smtClean="0">
+                <a:solidFill>
+                  <a:schemeClr val="tx1"/>
+                </a:solidFill>
+                <a:effectLst/>
+                <a:latin typeface="+mn-lt"/>
+                <a:ea typeface="+mn-ea"/>
+                <a:cs typeface="+mn-cs"/>
+              </a:rPr>
+              <a:t>доказва</a:t>
+            </a:r>
+            <a:r>
+              <a:rPr lang="en-US" sz="1200" kern="1200" dirty="0" smtClean="0">
+                <a:solidFill>
+                  <a:schemeClr val="tx1"/>
+                </a:solidFill>
+                <a:effectLst/>
+                <a:latin typeface="+mn-lt"/>
+                <a:ea typeface="+mn-ea"/>
+                <a:cs typeface="+mn-cs"/>
+              </a:rPr>
+              <a:t>, </a:t>
+            </a:r>
+            <a:r>
+              <a:rPr lang="en-US" sz="1200" kern="1200" dirty="0" err="1" smtClean="0">
+                <a:solidFill>
+                  <a:schemeClr val="tx1"/>
+                </a:solidFill>
+                <a:effectLst/>
+                <a:latin typeface="+mn-lt"/>
+                <a:ea typeface="+mn-ea"/>
+                <a:cs typeface="+mn-cs"/>
+              </a:rPr>
+              <a:t>че</a:t>
+            </a:r>
+            <a:r>
+              <a:rPr lang="en-US" sz="1200" kern="1200" dirty="0" smtClean="0">
+                <a:solidFill>
+                  <a:schemeClr val="tx1"/>
+                </a:solidFill>
+                <a:effectLst/>
+                <a:latin typeface="+mn-lt"/>
+                <a:ea typeface="+mn-ea"/>
+                <a:cs typeface="+mn-cs"/>
+              </a:rPr>
+              <a:t> с </a:t>
+            </a:r>
+            <a:r>
+              <a:rPr lang="en-US" sz="1200" kern="1200" dirty="0" err="1" smtClean="0">
+                <a:solidFill>
+                  <a:schemeClr val="tx1"/>
+                </a:solidFill>
+                <a:effectLst/>
+                <a:latin typeface="+mn-lt"/>
+                <a:ea typeface="+mn-ea"/>
+                <a:cs typeface="+mn-cs"/>
+              </a:rPr>
+              <a:t>отворен</a:t>
+            </a:r>
+            <a:r>
+              <a:rPr lang="en-US" sz="1200" kern="1200" dirty="0" smtClean="0">
+                <a:solidFill>
+                  <a:schemeClr val="tx1"/>
+                </a:solidFill>
+                <a:effectLst/>
+                <a:latin typeface="+mn-lt"/>
+                <a:ea typeface="+mn-ea"/>
+                <a:cs typeface="+mn-cs"/>
+              </a:rPr>
+              <a:t> </a:t>
+            </a:r>
+            <a:r>
+              <a:rPr lang="en-US" sz="1200" kern="1200" dirty="0" err="1" smtClean="0">
+                <a:solidFill>
+                  <a:schemeClr val="tx1"/>
+                </a:solidFill>
+                <a:effectLst/>
+                <a:latin typeface="+mn-lt"/>
+                <a:ea typeface="+mn-ea"/>
+                <a:cs typeface="+mn-cs"/>
+              </a:rPr>
+              <a:t>код</a:t>
+            </a:r>
+            <a:r>
+              <a:rPr lang="en-US" sz="1200" kern="1200" dirty="0" smtClean="0">
+                <a:solidFill>
+                  <a:schemeClr val="tx1"/>
+                </a:solidFill>
+                <a:effectLst/>
+                <a:latin typeface="+mn-lt"/>
+                <a:ea typeface="+mn-ea"/>
+                <a:cs typeface="+mn-cs"/>
+              </a:rPr>
+              <a:t> и </a:t>
+            </a:r>
+            <a:r>
+              <a:rPr lang="en-US" sz="1200" kern="1200" dirty="0" err="1" smtClean="0">
+                <a:solidFill>
+                  <a:schemeClr val="tx1"/>
+                </a:solidFill>
+                <a:effectLst/>
+                <a:latin typeface="+mn-lt"/>
+                <a:ea typeface="+mn-ea"/>
+                <a:cs typeface="+mn-cs"/>
+              </a:rPr>
+              <a:t>съвременни</a:t>
+            </a:r>
+            <a:r>
+              <a:rPr lang="en-US" sz="1200" kern="1200" dirty="0" smtClean="0">
+                <a:solidFill>
+                  <a:schemeClr val="tx1"/>
+                </a:solidFill>
+                <a:effectLst/>
+                <a:latin typeface="+mn-lt"/>
+                <a:ea typeface="+mn-ea"/>
+                <a:cs typeface="+mn-cs"/>
+              </a:rPr>
+              <a:t> </a:t>
+            </a:r>
+            <a:r>
+              <a:rPr lang="en-US" sz="1200" kern="1200" dirty="0" err="1" smtClean="0">
+                <a:solidFill>
+                  <a:schemeClr val="tx1"/>
+                </a:solidFill>
+                <a:effectLst/>
+                <a:latin typeface="+mn-lt"/>
+                <a:ea typeface="+mn-ea"/>
+                <a:cs typeface="+mn-cs"/>
+              </a:rPr>
+              <a:t>уеб</a:t>
+            </a:r>
+            <a:r>
+              <a:rPr lang="en-US" sz="1200" kern="1200" dirty="0" smtClean="0">
+                <a:solidFill>
+                  <a:schemeClr val="tx1"/>
+                </a:solidFill>
+                <a:effectLst/>
+                <a:latin typeface="+mn-lt"/>
+                <a:ea typeface="+mn-ea"/>
+                <a:cs typeface="+mn-cs"/>
+              </a:rPr>
+              <a:t> </a:t>
+            </a:r>
+            <a:r>
+              <a:rPr lang="en-US" sz="1200" kern="1200" dirty="0" err="1" smtClean="0">
+                <a:solidFill>
+                  <a:schemeClr val="tx1"/>
+                </a:solidFill>
+                <a:effectLst/>
+                <a:latin typeface="+mn-lt"/>
+                <a:ea typeface="+mn-ea"/>
+                <a:cs typeface="+mn-cs"/>
+              </a:rPr>
+              <a:t>технологии</a:t>
+            </a:r>
+            <a:r>
+              <a:rPr lang="en-US" sz="1200" kern="1200" dirty="0" smtClean="0">
+                <a:solidFill>
+                  <a:schemeClr val="tx1"/>
+                </a:solidFill>
+                <a:effectLst/>
+                <a:latin typeface="+mn-lt"/>
+                <a:ea typeface="+mn-ea"/>
+                <a:cs typeface="+mn-cs"/>
+              </a:rPr>
+              <a:t> </a:t>
+            </a:r>
+            <a:r>
+              <a:rPr lang="en-US" sz="1200" kern="1200" dirty="0" err="1" smtClean="0">
+                <a:solidFill>
+                  <a:schemeClr val="tx1"/>
+                </a:solidFill>
+                <a:effectLst/>
+                <a:latin typeface="+mn-lt"/>
+                <a:ea typeface="+mn-ea"/>
+                <a:cs typeface="+mn-cs"/>
               </a:rPr>
               <a:t>може</a:t>
             </a:r>
             <a:r>
-              <a:rPr lang="en-US" dirty="0">
-                <a:highlight>
-                  <a:srgbClr val="FFFFFF"/>
-                </a:highlight>
-              </a:rPr>
-              <a:t> </a:t>
-            </a:r>
-            <a:r>
-              <a:rPr lang="en-US" dirty="0" err="1">
-                <a:highlight>
-                  <a:srgbClr val="FFFFFF"/>
-                </a:highlight>
+              <a:rPr lang="en-US" sz="1200" kern="1200" dirty="0" smtClean="0">
+                <a:solidFill>
+                  <a:schemeClr val="tx1"/>
+                </a:solidFill>
+                <a:effectLst/>
+                <a:latin typeface="+mn-lt"/>
+                <a:ea typeface="+mn-ea"/>
+                <a:cs typeface="+mn-cs"/>
+              </a:rPr>
+              <a:t> </a:t>
+            </a:r>
+            <a:r>
+              <a:rPr lang="en-US" sz="1200" kern="1200" dirty="0" err="1" smtClean="0">
+                <a:solidFill>
+                  <a:schemeClr val="tx1"/>
+                </a:solidFill>
+                <a:effectLst/>
+                <a:latin typeface="+mn-lt"/>
+                <a:ea typeface="+mn-ea"/>
+                <a:cs typeface="+mn-cs"/>
               </a:rPr>
               <a:t>да</a:t>
             </a:r>
             <a:r>
-              <a:rPr lang="en-US" dirty="0">
-                <a:highlight>
-                  <a:srgbClr val="FFFFFF"/>
-                </a:highlight>
-              </a:rPr>
-              <a:t> </a:t>
-            </a:r>
-            <a:r>
-              <a:rPr lang="en-US" dirty="0" err="1">
-                <a:highlight>
-                  <a:srgbClr val="FFFFFF"/>
-                </a:highlight>
+              <a:rPr lang="en-US" sz="1200" kern="1200" dirty="0" smtClean="0">
+                <a:solidFill>
+                  <a:schemeClr val="tx1"/>
+                </a:solidFill>
+                <a:effectLst/>
+                <a:latin typeface="+mn-lt"/>
+                <a:ea typeface="+mn-ea"/>
+                <a:cs typeface="+mn-cs"/>
+              </a:rPr>
+              <a:t> </a:t>
+            </a:r>
+            <a:r>
+              <a:rPr lang="en-US" sz="1200" kern="1200" dirty="0" err="1" smtClean="0">
+                <a:solidFill>
+                  <a:schemeClr val="tx1"/>
+                </a:solidFill>
+                <a:effectLst/>
+                <a:latin typeface="+mn-lt"/>
+                <a:ea typeface="+mn-ea"/>
+                <a:cs typeface="+mn-cs"/>
               </a:rPr>
               <a:t>се</a:t>
             </a:r>
             <a:r>
-              <a:rPr lang="en-US" dirty="0">
-                <a:highlight>
-                  <a:srgbClr val="FFFFFF"/>
-                </a:highlight>
-              </a:rPr>
-              <a:t> </a:t>
-            </a:r>
-            <a:r>
-              <a:rPr lang="en-US" dirty="0" err="1">
-                <a:highlight>
-                  <a:srgbClr val="FFFFFF"/>
-                </a:highlight>
-              </a:rPr>
-              <a:t>разшири</a:t>
-            </a:r>
-            <a:r>
-              <a:rPr lang="en-US" dirty="0">
-                <a:highlight>
-                  <a:srgbClr val="FFFFFF"/>
-                </a:highlight>
-              </a:rPr>
-              <a:t> с ML </a:t>
-            </a:r>
-            <a:r>
-              <a:rPr lang="en-US" dirty="0" err="1">
-                <a:highlight>
-                  <a:srgbClr val="FFFFFF"/>
-                </a:highlight>
-              </a:rPr>
-              <a:t>детекция</a:t>
-            </a:r>
-            <a:r>
-              <a:rPr lang="en-US" dirty="0">
-                <a:highlight>
-                  <a:srgbClr val="FFFFFF"/>
-                </a:highlight>
-              </a:rPr>
-              <a:t>, WebRTC и </a:t>
-            </a:r>
-            <a:r>
-              <a:rPr lang="en-US" dirty="0" err="1">
-                <a:highlight>
-                  <a:srgbClr val="FFFFFF"/>
-                </a:highlight>
-              </a:rPr>
-              <a:t>поддържка</a:t>
-            </a:r>
-            <a:r>
-              <a:rPr lang="en-US" dirty="0">
-                <a:highlight>
-                  <a:srgbClr val="FFFFFF"/>
-                </a:highlight>
-              </a:rPr>
-              <a:t> </a:t>
-            </a:r>
-            <a:r>
-              <a:rPr lang="en-US" dirty="0" err="1">
-                <a:highlight>
-                  <a:srgbClr val="FFFFFF"/>
-                </a:highlight>
-              </a:rPr>
-              <a:t>на</a:t>
-            </a:r>
-            <a:r>
-              <a:rPr lang="en-US" dirty="0">
-                <a:highlight>
-                  <a:srgbClr val="FFFFFF"/>
-                </a:highlight>
-              </a:rPr>
-              <a:t> </a:t>
-            </a:r>
-            <a:r>
-              <a:rPr lang="en-US" dirty="0" err="1">
-                <a:highlight>
-                  <a:srgbClr val="FFFFFF"/>
-                </a:highlight>
-              </a:rPr>
-              <a:t>множество</a:t>
-            </a:r>
-            <a:r>
-              <a:rPr lang="en-US" dirty="0">
-                <a:highlight>
-                  <a:srgbClr val="FFFFFF"/>
-                </a:highlight>
-              </a:rPr>
-              <a:t> </a:t>
-            </a:r>
-            <a:r>
-              <a:rPr lang="en-US" dirty="0" err="1">
-                <a:highlight>
-                  <a:srgbClr val="FFFFFF"/>
-                </a:highlight>
-              </a:rPr>
-              <a:t>камери</a:t>
-            </a:r>
-            <a:r>
-              <a:rPr lang="en-US" dirty="0">
-                <a:highlight>
-                  <a:srgbClr val="FFFFFF"/>
-                </a:highlight>
-              </a:rPr>
-              <a:t>. Проектът </a:t>
-            </a:r>
-            <a:r>
-              <a:rPr lang="en-US" dirty="0" err="1">
-                <a:highlight>
-                  <a:srgbClr val="FFFFFF"/>
-                </a:highlight>
-              </a:rPr>
-              <a:t>доказва</a:t>
-            </a:r>
-            <a:r>
-              <a:rPr lang="en-US" dirty="0">
-                <a:highlight>
-                  <a:srgbClr val="FFFFFF"/>
-                </a:highlight>
-              </a:rPr>
-              <a:t>, </a:t>
-            </a:r>
-            <a:r>
-              <a:rPr lang="en-US" dirty="0" err="1">
-                <a:highlight>
-                  <a:srgbClr val="FFFFFF"/>
-                </a:highlight>
-              </a:rPr>
-              <a:t>че</a:t>
-            </a:r>
-            <a:r>
-              <a:rPr lang="en-US" dirty="0">
-                <a:highlight>
-                  <a:srgbClr val="FFFFFF"/>
-                </a:highlight>
-              </a:rPr>
-              <a:t> с </a:t>
-            </a:r>
-            <a:r>
-              <a:rPr lang="en-US" dirty="0" err="1">
-                <a:highlight>
-                  <a:srgbClr val="FFFFFF"/>
-                </a:highlight>
-              </a:rPr>
-              <a:t>отворен</a:t>
-            </a:r>
-            <a:r>
-              <a:rPr lang="en-US" dirty="0">
-                <a:highlight>
-                  <a:srgbClr val="FFFFFF"/>
-                </a:highlight>
-              </a:rPr>
-              <a:t> </a:t>
-            </a:r>
-            <a:r>
-              <a:rPr lang="en-US" dirty="0" err="1">
-                <a:highlight>
-                  <a:srgbClr val="FFFFFF"/>
-                </a:highlight>
-              </a:rPr>
-              <a:t>код</a:t>
-            </a:r>
-            <a:r>
-              <a:rPr lang="en-US" dirty="0">
-                <a:highlight>
-                  <a:srgbClr val="FFFFFF"/>
-                </a:highlight>
-              </a:rPr>
-              <a:t> и </a:t>
-            </a:r>
-            <a:r>
-              <a:rPr lang="en-US" dirty="0" err="1">
-                <a:highlight>
-                  <a:srgbClr val="FFFFFF"/>
-                </a:highlight>
-              </a:rPr>
-              <a:t>съвременни</a:t>
-            </a:r>
-            <a:r>
-              <a:rPr lang="en-US" dirty="0">
-                <a:highlight>
-                  <a:srgbClr val="FFFFFF"/>
-                </a:highlight>
-              </a:rPr>
-              <a:t> </a:t>
-            </a:r>
-            <a:r>
-              <a:rPr lang="en-US" dirty="0" err="1">
-                <a:highlight>
-                  <a:srgbClr val="FFFFFF"/>
-                </a:highlight>
-              </a:rPr>
-              <a:t>уеб</a:t>
-            </a:r>
-            <a:r>
-              <a:rPr lang="en-US" dirty="0">
-                <a:highlight>
-                  <a:srgbClr val="FFFFFF"/>
-                </a:highlight>
-              </a:rPr>
-              <a:t> </a:t>
-            </a:r>
-            <a:r>
-              <a:rPr lang="en-US" dirty="0" err="1">
-                <a:highlight>
-                  <a:srgbClr val="FFFFFF"/>
-                </a:highlight>
-              </a:rPr>
-              <a:t>технологии</a:t>
-            </a:r>
-            <a:r>
-              <a:rPr lang="en-US" dirty="0">
-                <a:highlight>
-                  <a:srgbClr val="FFFFFF"/>
-                </a:highlight>
-              </a:rPr>
-              <a:t> </a:t>
-            </a:r>
-            <a:r>
-              <a:rPr lang="en-US" dirty="0" err="1">
-                <a:highlight>
-                  <a:srgbClr val="FFFFFF"/>
-                </a:highlight>
-              </a:rPr>
-              <a:t>може</a:t>
-            </a:r>
-            <a:r>
-              <a:rPr lang="en-US" dirty="0">
-                <a:highlight>
-                  <a:srgbClr val="FFFFFF"/>
-                </a:highlight>
-              </a:rPr>
-              <a:t> </a:t>
-            </a:r>
-            <a:r>
-              <a:rPr lang="en-US" dirty="0" err="1">
-                <a:highlight>
-                  <a:srgbClr val="FFFFFF"/>
-                </a:highlight>
-              </a:rPr>
-              <a:t>да</a:t>
-            </a:r>
-            <a:r>
-              <a:rPr lang="en-US" dirty="0">
-                <a:highlight>
-                  <a:srgbClr val="FFFFFF"/>
-                </a:highlight>
-              </a:rPr>
-              <a:t> </a:t>
-            </a:r>
-            <a:r>
-              <a:rPr lang="en-US" dirty="0" err="1">
-                <a:highlight>
-                  <a:srgbClr val="FFFFFF"/>
-                </a:highlight>
-              </a:rPr>
-              <a:t>се</a:t>
-            </a:r>
-            <a:r>
-              <a:rPr lang="en-US" dirty="0">
-                <a:highlight>
-                  <a:srgbClr val="FFFFFF"/>
-                </a:highlight>
-              </a:rPr>
-              <a:t> </a:t>
-            </a:r>
-            <a:r>
-              <a:rPr lang="en-US" dirty="0" err="1">
-                <a:highlight>
-                  <a:srgbClr val="FFFFFF"/>
-                </a:highlight>
+              <a:rPr lang="en-US" sz="1200" kern="1200" dirty="0" smtClean="0">
+                <a:solidFill>
+                  <a:schemeClr val="tx1"/>
+                </a:solidFill>
+                <a:effectLst/>
+                <a:latin typeface="+mn-lt"/>
+                <a:ea typeface="+mn-ea"/>
+                <a:cs typeface="+mn-cs"/>
+              </a:rPr>
+              <a:t> </a:t>
+            </a:r>
+            <a:r>
+              <a:rPr lang="en-US" sz="1200" kern="1200" dirty="0" err="1" smtClean="0">
+                <a:solidFill>
+                  <a:schemeClr val="tx1"/>
+                </a:solidFill>
+                <a:effectLst/>
+                <a:latin typeface="+mn-lt"/>
+                <a:ea typeface="+mn-ea"/>
+                <a:cs typeface="+mn-cs"/>
               </a:rPr>
               <a:t>изгради</a:t>
             </a:r>
             <a:r>
-              <a:rPr lang="en-US" dirty="0">
-                <a:highlight>
-                  <a:srgbClr val="FFFFFF"/>
-                </a:highlight>
-              </a:rPr>
-              <a:t> </a:t>
-            </a:r>
-            <a:r>
-              <a:rPr lang="en-US" dirty="0" err="1">
-                <a:highlight>
-                  <a:srgbClr val="FFFFFF"/>
-                </a:highlight>
+              <a:rPr lang="en-US" sz="1200" kern="1200" dirty="0" smtClean="0">
+                <a:solidFill>
+                  <a:schemeClr val="tx1"/>
+                </a:solidFill>
+                <a:effectLst/>
+                <a:latin typeface="+mn-lt"/>
+                <a:ea typeface="+mn-ea"/>
+                <a:cs typeface="+mn-cs"/>
+              </a:rPr>
+              <a:t> </a:t>
+            </a:r>
+            <a:r>
+              <a:rPr lang="en-US" sz="1200" kern="1200" dirty="0" err="1" smtClean="0">
+                <a:solidFill>
+                  <a:schemeClr val="tx1"/>
+                </a:solidFill>
+                <a:effectLst/>
+                <a:latin typeface="+mn-lt"/>
+                <a:ea typeface="+mn-ea"/>
+                <a:cs typeface="+mn-cs"/>
               </a:rPr>
               <a:t>надеждна</a:t>
             </a:r>
             <a:r>
-              <a:rPr lang="en-US" dirty="0">
-                <a:highlight>
-                  <a:srgbClr val="FFFFFF"/>
-                </a:highlight>
-              </a:rPr>
-              <a:t> </a:t>
-            </a:r>
-            <a:r>
-              <a:rPr lang="en-US" dirty="0" err="1">
-                <a:highlight>
-                  <a:srgbClr val="FFFFFF"/>
-                </a:highlight>
+              <a:rPr lang="en-US" sz="1200" kern="1200" dirty="0" smtClean="0">
+                <a:solidFill>
+                  <a:schemeClr val="tx1"/>
+                </a:solidFill>
+                <a:effectLst/>
+                <a:latin typeface="+mn-lt"/>
+                <a:ea typeface="+mn-ea"/>
+                <a:cs typeface="+mn-cs"/>
+              </a:rPr>
+              <a:t> и </a:t>
+            </a:r>
+            <a:r>
+              <a:rPr lang="en-US" sz="1200" kern="1200" dirty="0" err="1" smtClean="0">
+                <a:solidFill>
+                  <a:schemeClr val="tx1"/>
+                </a:solidFill>
+                <a:effectLst/>
+                <a:latin typeface="+mn-lt"/>
+                <a:ea typeface="+mn-ea"/>
+                <a:cs typeface="+mn-cs"/>
+              </a:rPr>
+              <a:t>функционална</a:t>
+            </a:r>
+            <a:r>
+              <a:rPr lang="en-US" sz="1200" kern="1200" dirty="0" smtClean="0">
+                <a:solidFill>
+                  <a:schemeClr val="tx1"/>
+                </a:solidFill>
+                <a:effectLst/>
+                <a:latin typeface="+mn-lt"/>
+                <a:ea typeface="+mn-ea"/>
+                <a:cs typeface="+mn-cs"/>
+              </a:rPr>
+              <a:t> </a:t>
+            </a:r>
+            <a:r>
+              <a:rPr lang="en-US" sz="1200" kern="1200" dirty="0" err="1" smtClean="0">
+                <a:solidFill>
+                  <a:schemeClr val="tx1"/>
+                </a:solidFill>
+                <a:effectLst/>
+                <a:latin typeface="+mn-lt"/>
+                <a:ea typeface="+mn-ea"/>
+                <a:cs typeface="+mn-cs"/>
               </a:rPr>
               <a:t>система</a:t>
             </a:r>
             <a:r>
-              <a:rPr lang="en-US" dirty="0">
-                <a:highlight>
-                  <a:srgbClr val="FFFFFF"/>
-                </a:highlight>
-              </a:rPr>
-              <a:t> </a:t>
-            </a:r>
-            <a:r>
-              <a:rPr lang="en-US" dirty="0" err="1">
-                <a:highlight>
-                  <a:srgbClr val="FFFFFF"/>
-                </a:highlight>
+              <a:rPr lang="en-US" sz="1200" kern="1200" dirty="0" smtClean="0">
+                <a:solidFill>
+                  <a:schemeClr val="tx1"/>
+                </a:solidFill>
+                <a:effectLst/>
+                <a:latin typeface="+mn-lt"/>
+                <a:ea typeface="+mn-ea"/>
+                <a:cs typeface="+mn-cs"/>
+              </a:rPr>
+              <a:t> </a:t>
+            </a:r>
+            <a:r>
+              <a:rPr lang="en-US" sz="1200" kern="1200" dirty="0" err="1" smtClean="0">
+                <a:solidFill>
+                  <a:schemeClr val="tx1"/>
+                </a:solidFill>
+                <a:effectLst/>
+                <a:latin typeface="+mn-lt"/>
+                <a:ea typeface="+mn-ea"/>
+                <a:cs typeface="+mn-cs"/>
               </a:rPr>
               <a:t>без</a:t>
             </a:r>
             <a:r>
-              <a:rPr lang="en-US" dirty="0">
-                <a:highlight>
-                  <a:srgbClr val="FFFFFF"/>
-                </a:highlight>
-              </a:rPr>
-              <a:t> </a:t>
-            </a:r>
-            <a:r>
-              <a:rPr lang="en-US" dirty="0" err="1">
-                <a:highlight>
-                  <a:srgbClr val="FFFFFF"/>
-                </a:highlight>
+              <a:rPr lang="en-US" sz="1200" kern="1200" dirty="0" smtClean="0">
+                <a:solidFill>
+                  <a:schemeClr val="tx1"/>
+                </a:solidFill>
+                <a:effectLst/>
+                <a:latin typeface="+mn-lt"/>
+                <a:ea typeface="+mn-ea"/>
+                <a:cs typeface="+mn-cs"/>
+              </a:rPr>
+              <a:t> </a:t>
+            </a:r>
+            <a:r>
+              <a:rPr lang="en-US" sz="1200" kern="1200" dirty="0" err="1" smtClean="0">
+                <a:solidFill>
+                  <a:schemeClr val="tx1"/>
+                </a:solidFill>
+                <a:effectLst/>
+                <a:latin typeface="+mn-lt"/>
+                <a:ea typeface="+mn-ea"/>
+                <a:cs typeface="+mn-cs"/>
               </a:rPr>
               <a:t>скъпи</a:t>
             </a:r>
             <a:r>
-              <a:rPr lang="en-US" dirty="0">
-                <a:highlight>
-                  <a:srgbClr val="FFFFFF"/>
-                </a:highlight>
-              </a:rPr>
-              <a:t> </a:t>
-            </a:r>
-            <a:r>
-              <a:rPr lang="en-US" dirty="0" err="1">
-                <a:highlight>
-                  <a:srgbClr val="FFFFFF"/>
-                </a:highlight>
+              <a:rPr lang="en-US" sz="1200" kern="1200" dirty="0" smtClean="0">
+                <a:solidFill>
+                  <a:schemeClr val="tx1"/>
+                </a:solidFill>
+                <a:effectLst/>
+                <a:latin typeface="+mn-lt"/>
+                <a:ea typeface="+mn-ea"/>
+                <a:cs typeface="+mn-cs"/>
+              </a:rPr>
+              <a:t> </a:t>
+            </a:r>
+            <a:r>
+              <a:rPr lang="en-US" sz="1200" kern="1200" dirty="0" err="1" smtClean="0">
+                <a:solidFill>
+                  <a:schemeClr val="tx1"/>
+                </a:solidFill>
+                <a:effectLst/>
+                <a:latin typeface="+mn-lt"/>
+                <a:ea typeface="+mn-ea"/>
+                <a:cs typeface="+mn-cs"/>
               </a:rPr>
               <a:t>лицензи</a:t>
             </a:r>
             <a:r>
-              <a:rPr lang="en-US" dirty="0">
-                <a:highlight>
-                  <a:srgbClr val="FFFFFF"/>
-                </a:highlight>
+              <a:rPr lang="en-US" sz="1200" kern="1200" dirty="0" smtClean="0">
+                <a:solidFill>
+                  <a:schemeClr val="tx1"/>
+                </a:solidFill>
+                <a:effectLst/>
+                <a:latin typeface="+mn-lt"/>
+                <a:ea typeface="+mn-ea"/>
+                <a:cs typeface="+mn-cs"/>
               </a:rPr>
               <a:t>.</a:t>
             </a:r>
+            <a:endParaRPr lang="bg-BG" sz="1200" kern="1200" dirty="0" smtClean="0">
+              <a:solidFill>
+                <a:schemeClr val="tx1"/>
+              </a:solidFill>
+              <a:effectLst/>
+              <a:latin typeface="+mn-lt"/>
+              <a:ea typeface="+mn-ea"/>
+              <a:cs typeface="+mn-cs"/>
+            </a:endParaRPr>
+          </a:p>
+          <a:p>
             <a:endParaRPr lang="en-US" dirty="0">
               <a:highlight>
                 <a:srgbClr val="606060"/>
@@ -1738,6 +2286,62 @@
           <a:bodyPr/>
           <a:lstStyle/>
           <a:p>
+            <a:r>
+              <a:rPr lang="ru-RU" b="1" dirty="0" smtClean="0">
+                <a:effectLst/>
+              </a:rPr>
+              <a:t>Claude </a:t>
+            </a:r>
+            <a:r>
+              <a:rPr lang="ru-RU" b="1" dirty="0" smtClean="0">
+                <a:effectLst/>
+              </a:rPr>
+              <a:t>responded: GDPR е европейски закон за защита на личните данни.</a:t>
+            </a:r>
+          </a:p>
+          <a:p>
+            <a:r>
+              <a:rPr lang="ru-RU" b="1" dirty="0" smtClean="0">
+                <a:effectLst/>
+              </a:rPr>
+              <a:t>GDPR</a:t>
+            </a:r>
+            <a:r>
+              <a:rPr lang="ru-RU" dirty="0" smtClean="0">
+                <a:effectLst/>
+              </a:rPr>
+              <a:t> е европейски закон за защита на личните данни. При видеонаблюдение задължава системата да уведомява наблюдаваните лица, да ограничава достъпа и да не съхранява записите по-дълго от необходимото.</a:t>
+            </a:r>
+          </a:p>
+          <a:p>
+            <a:r>
+              <a:rPr lang="ru-RU" b="1" dirty="0" smtClean="0"/>
+              <a:t>REST API</a:t>
+            </a:r>
+            <a:r>
+              <a:rPr lang="ru-RU" dirty="0" smtClean="0"/>
+              <a:t> е начин за комуникация между браузъра и сървъра чрез HTTP заявки. В твоя проект браузърът изпраща заявки към Django, за да управлява камерите и събитията без да презарежда страницата.</a:t>
+            </a:r>
+          </a:p>
+          <a:p>
+            <a:r>
+              <a:rPr lang="ru-RU" b="1" dirty="0" smtClean="0"/>
+              <a:t>WebRTC</a:t>
+            </a:r>
+            <a:r>
+              <a:rPr lang="ru-RU" dirty="0" smtClean="0"/>
+              <a:t> е технология за директна комуникация между браузъри в реално време с много ниско закъснение. Използва се в Zoom и Google Meet. В твоя проект е посочена като бъдещо подобрение, тъй като е по-сложна за реализация.</a:t>
+            </a:r>
+          </a:p>
+          <a:p>
+            <a:r>
+              <a:rPr lang="ru-RU" b="1" dirty="0" smtClean="0"/>
+              <a:t>Frame Differencing</a:t>
+            </a:r>
+            <a:r>
+              <a:rPr lang="ru-RU" dirty="0" smtClean="0"/>
+              <a:t> е алгоритъм за засичане на движение, при който всеки нов кадър се сравнява с предишния. Където пикселите се различават значително, там се приема че има движение и обектът се маркира с правоъгълна рамка.</a:t>
+            </a:r>
             <a:endParaRPr lang="en-US" dirty="0"/>
           </a:p>
         </p:txBody>
@@ -2756,49 +3360,10 @@
           <a:bodyPr/>
           <a:lstStyle/>
           <a:p>
-            <a:pPr marL="0" marR="0" indent="0" algn="l" defTabSz="914400" rtl="0" eaLnBrk="1" fontAlgn="auto" latinLnBrk="0" hangingPunct="1">
-              <a:lnSpc>
-                <a:spcPct val="100000"/>
-              </a:lnSpc>
-              <a:spcBef>
-                <a:spcPts val="0"/>
-              </a:spcBef>
-              <a:spcAft>
-                <a:spcPts val="0"/>
-              </a:spcAft>
-              <a:buClrTx/>
-              <a:buSzTx/>
-              <a:buFontTx/>
-              <a:buNone/>
-              <a:tabLst/>
-              <a:defRPr/>
-            </a:pPr>
-            <a:r>
-              <a:rPr lang="bg-BG" sz="1200" kern="1200" dirty="0" smtClean="0">
-                <a:solidFill>
-                  <a:schemeClr val="tx1"/>
-                </a:solidFill>
-                <a:effectLst/>
-                <a:latin typeface="+mn-lt"/>
-                <a:ea typeface="+mn-ea"/>
-                <a:cs typeface="+mn-cs"/>
-              </a:rPr>
-              <a:t>Frame differencing започва с преобразуване на кадъра в сива скала и Gaussian blur (21×21), за да се премахне шумът и да се ускори обработката. След това се изчислява абсолютната разлика между два последователни кадъра, резултатът се бинаризира чрез thresholding и се търсят контури по светлите области. </a:t>
-            </a:r>
-            <a:r>
-              <a:rPr lang="bg-BG" sz="1200" kern="1200" smtClean="0">
-                <a:solidFill>
-                  <a:schemeClr val="tx1"/>
-                </a:solidFill>
-                <a:effectLst/>
-                <a:latin typeface="+mn-lt"/>
-                <a:ea typeface="+mn-ea"/>
-                <a:cs typeface="+mn-cs"/>
-              </a:rPr>
-              <a:t>Накрая около достатъчно големите контури се чертаят bounding boxes в реалния кадър, маркирайки движещите се обекти — всичко това само с пикселна аритметика, без ML модели, което го прави изключително лек за слаб хардуер.</a:t>
-            </a:r>
-          </a:p>
-          <a:p>
+            <a:r>
+              <a:rPr lang="ru-RU" dirty="0" smtClean="0"/>
+              <a:t>Алгоритъмът за детекция на движение работи на принципа frame differencing, при който всеки нов кадър се сравнява с предишния. Чрез Gaussian blur и thresholding се филтрират малките промени и се открояват само зоните с реално движение.</a:t>
+            </a:r>
             <a:endParaRPr lang="en-US" dirty="0">
               <a:highlight>
                 <a:srgbClr val="606060"/>
@@ -2983,49 +3548,10 @@
           <a:bodyPr/>
           <a:lstStyle/>
           <a:p>
-            <a:pPr marL="0" marR="0" indent="0" algn="l" defTabSz="914400" rtl="0" eaLnBrk="1" fontAlgn="auto" latinLnBrk="0" hangingPunct="1">
-              <a:lnSpc>
-                <a:spcPct val="100000"/>
-              </a:lnSpc>
-              <a:spcBef>
-                <a:spcPts val="0"/>
-              </a:spcBef>
-              <a:spcAft>
-                <a:spcPts val="0"/>
-              </a:spcAft>
-              <a:buClrTx/>
-              <a:buSzTx/>
-              <a:buFontTx/>
-              <a:buNone/>
-              <a:tabLst/>
-              <a:defRPr/>
-            </a:pPr>
-            <a:r>
-              <a:rPr lang="bg-BG" sz="1200" kern="1200" dirty="0" smtClean="0">
-                <a:solidFill>
-                  <a:schemeClr val="tx1"/>
-                </a:solidFill>
-                <a:effectLst/>
-                <a:latin typeface="+mn-lt"/>
-                <a:ea typeface="+mn-ea"/>
-                <a:cs typeface="+mn-cs"/>
-              </a:rPr>
-              <a:t>Системата предава видео на живо от камерата и автоматично засича движение чрез алгоритъма frame differencing. Всяко събитие се записва в базата данни с времеви печат и снимка на кадъра, а достъпът до системата е защитен чрез потребителска аутентикация и управление на сесии. </a:t>
-            </a:r>
-            <a:r>
-              <a:rPr lang="bg-BG" sz="1200" kern="1200" smtClean="0">
-                <a:solidFill>
-                  <a:schemeClr val="tx1"/>
-                </a:solidFill>
-                <a:effectLst/>
-                <a:latin typeface="+mn-lt"/>
-                <a:ea typeface="+mn-ea"/>
-                <a:cs typeface="+mn-cs"/>
-              </a:rPr>
-              <a:t>Камерите могат да се управляват дистанционно през REST API, а целият интерфейс работи в браузъра без инсталация на допълнителен софтуер.</a:t>
-            </a:r>
-          </a:p>
-          <a:p>
+            <a:r>
+              <a:rPr lang="ru-RU" dirty="0" smtClean="0"/>
+              <a:t>Системата предоставя видеопоток в реално време, който се визуализира директно в браузъра. При засечено движение автоматично се записва снимка и събитието се логва в базата данни. Достъпът до системата е защитен чрез управление на потребителски права, а камерите се управляват асинхронно чрез REST API.</a:t>
+            </a:r>
             <a:endParaRPr lang="en-US" dirty="0">
               <a:highlight>
                 <a:srgbClr val="606060"/>
@@ -4556,6 +5082,13 @@
   <p:clrMapOvr>
     <a:masterClrMapping/>
   </p:clrMapOvr>
+  <p:timing>
+    <p:tnLst>
+      <p:par>
+        <p:cTn id="1" dur="indefinite" restart="never" nodeType="tmRoot"/>
+      </p:par>
+    </p:tnLst>
+  </p:timing>
 </p:sld>
 </file>
 
@@ -5058,11 +5591,59 @@
           </a:p>
         </p:txBody>
       </p:sp>
+      <p:pic>
+        <p:nvPicPr>
+          <p:cNvPr id="3074" name="Picture 2" descr="What is Digital Transformation and Why is it important? | Emeritus India"/>
+          <p:cNvPicPr>
+            <a:picLocks noChangeAspect="1" noChangeArrowheads="1"/>
+          </p:cNvPicPr>
+          <p:nvPr/>
+        </p:nvPicPr>
+        <p:blipFill>
+          <a:blip r:embed="rId4">
+            <a:extLst>
+              <a:ext uri="{28A0092B-C50C-407E-A947-70E740481C1C}">
+                <a14:useLocalDpi xmlns:a14="http://schemas.microsoft.com/office/drawing/2010/main" val="0"/>
+              </a:ext>
+            </a:extLst>
+          </a:blip>
+          <a:srcRect/>
+          <a:stretch>
+            <a:fillRect/>
+          </a:stretch>
+        </p:blipFill>
+        <p:spPr bwMode="auto">
+          <a:xfrm>
+            <a:off x="4663440" y="896683"/>
+            <a:ext cx="4160520" cy="3784473"/>
+          </a:xfrm>
+          <a:prstGeom prst="rect">
+            <a:avLst/>
+          </a:prstGeom>
+          <a:noFill/>
+          <a:extLst>
+            <a:ext uri="{909E8E84-426E-40DD-AFC4-6F175D3DCCD1}">
+              <a14:hiddenFill xmlns:a14="http://schemas.microsoft.com/office/drawing/2010/main">
+                <a:solidFill>
+                  <a:srgbClr val="FFFFFF"/>
+                </a:solidFill>
+              </a14:hiddenFill>
+            </a:ext>
+          </a:extLst>
+        </p:spPr>
+      </p:pic>
     </p:spTree>
   </p:cSld>
   <p:clrMapOvr>
     <a:masterClrMapping/>
   </p:clrMapOvr>
+  <p:timing>
+    <p:tnLst>
+      <p:par>
+        <p:cTn id="1" dur="indefinite" restart="never" nodeType="tmRoot"/>
+      </p:par>
+    </p:tnLst>
+  </p:timing>
 </p:sld>
 </file>
 
@@ -5238,6 +5819,13 @@
   <p:clrMapOvr>
     <a:masterClrMapping/>
   </p:clrMapOvr>
+  <p:timing>
+    <p:tnLst>
+      <p:par>
+        <p:cTn id="1" dur="indefinite" restart="never" nodeType="tmRoot"/>
+      </p:par>
+    </p:tnLst>
+  </p:timing>
 </p:sld>
 </file>
 
@@ -5662,11 +6250,59 @@
           </a:p>
         </p:txBody>
       </p:sp>
+      <p:pic>
+        <p:nvPicPr>
+          <p:cNvPr id="2050" name="Picture 2" descr="Digital Transformation No Longer Optional for Nigerian Businesses – PPC –  PPC Limited"/>
+          <p:cNvPicPr>
+            <a:picLocks noChangeAspect="1" noChangeArrowheads="1"/>
+          </p:cNvPicPr>
+          <p:nvPr/>
+        </p:nvPicPr>
+        <p:blipFill>
+          <a:blip r:embed="rId4">
+            <a:extLst>
+              <a:ext uri="{28A0092B-C50C-407E-A947-70E740481C1C}">
+                <a14:useLocalDpi xmlns:a14="http://schemas.microsoft.com/office/drawing/2010/main" val="0"/>
+              </a:ext>
+            </a:extLst>
+          </a:blip>
+          <a:srcRect/>
+          <a:stretch>
+            <a:fillRect/>
+          </a:stretch>
+        </p:blipFill>
+        <p:spPr bwMode="auto">
+          <a:xfrm>
+            <a:off x="209772" y="868680"/>
+            <a:ext cx="4142772" cy="3566160"/>
+          </a:xfrm>
+          <a:prstGeom prst="rect">
+            <a:avLst/>
+          </a:prstGeom>
+          <a:noFill/>
+          <a:extLst>
+            <a:ext uri="{909E8E84-426E-40DD-AFC4-6F175D3DCCD1}">
+              <a14:hiddenFill xmlns:a14="http://schemas.microsoft.com/office/drawing/2010/main">
+                <a:solidFill>
+                  <a:srgbClr val="FFFFFF"/>
+                </a:solidFill>
+              </a14:hiddenFill>
+            </a:ext>
+          </a:extLst>
+        </p:spPr>
+      </p:pic>
     </p:spTree>
   </p:cSld>
   <p:clrMapOvr>
     <a:masterClrMapping/>
   </p:clrMapOvr>
+  <p:timing>
+    <p:tnLst>
+      <p:par>
+        <p:cTn id="1" dur="indefinite" restart="never" nodeType="tmRoot"/>
+      </p:par>
+    </p:tnLst>
+  </p:timing>
 </p:sld>
 </file>
 
@@ -6211,6 +6847,13 @@
   <p:clrMapOvr>
     <a:masterClrMapping/>
   </p:clrMapOvr>
+  <p:timing>
+    <p:tnLst>
+      <p:par>
+        <p:cTn id="1" dur="indefinite" restart="never" nodeType="tmRoot"/>
+      </p:par>
+    </p:tnLst>
+  </p:timing>
 </p:sld>
 </file>
 
@@ -6968,6 +7611,13 @@
   <p:clrMapOvr>
     <a:masterClrMapping/>
   </p:clrMapOvr>
+  <p:timing>
+    <p:tnLst>
+      <p:par>
+        <p:cTn id="1" dur="indefinite" restart="never" nodeType="tmRoot"/>
+      </p:par>
+    </p:tnLst>
+  </p:timing>
 </p:sld>
 </file>
 
@@ -8064,6 +8714,13 @@
   <p:clrMapOvr>
     <a:masterClrMapping/>
   </p:clrMapOvr>
+  <p:timing>
+    <p:tnLst>
+      <p:par>
+        <p:cTn id="1" dur="indefinite" restart="never" nodeType="tmRoot"/>
+      </p:par>
+    </p:tnLst>
+  </p:timing>
 </p:sld>
 </file>
 
@@ -8156,29 +8813,6 @@
           </a:p>
         </p:txBody>
       </p:sp>
-      <p:pic>
-        <p:nvPicPr>
-          <p:cNvPr id="4" name="Image 0" descr="https://images.unsplash.com/photo-1617802690658-1173a812650d?w=600&amp;q=80"/>
-          <p:cNvPicPr>
-            <a:picLocks noChangeAspect="1"/>
-          </p:cNvPicPr>
-          <p:nvPr/>
-        </p:nvPicPr>
-        <p:blipFill>
-          <a:blip r:embed="rId3"/>
-          <a:srcRect/>
-          <a:stretch/>
-        </p:blipFill>
-        <p:spPr>
-          <a:xfrm>
-            <a:off x="5029200" y="914400"/>
-            <a:ext cx="3794760" cy="3566160"/>
-          </a:xfrm>
-          <a:prstGeom prst="rect">
-            <a:avLst/>
-          </a:prstGeom>
-        </p:spPr>
-      </p:pic>
       <p:sp>
         <p:nvSpPr>
           <p:cNvPr id="5" name="Shape 2"/>
@@ -8797,11 +9431,82 @@
           </a:p>
         </p:txBody>
       </p:sp>
+      <p:pic>
+        <p:nvPicPr>
+          <p:cNvPr id="24" name="Image 0" descr="https://images.unsplash.com/photo-1617802690658-1173a812650d?w=600&amp;q=80"/>
+          <p:cNvPicPr>
+            <a:picLocks noChangeAspect="1"/>
+          </p:cNvPicPr>
+          <p:nvPr/>
+        </p:nvPicPr>
+        <p:blipFill>
+          <a:blip r:embed="rId3"/>
+          <a:srcRect/>
+          <a:stretch/>
+        </p:blipFill>
+        <p:spPr>
+          <a:xfrm>
+            <a:off x="4419725" y="841248"/>
+            <a:ext cx="2942627" cy="3566160"/>
+          </a:xfrm>
+          <a:prstGeom prst="rect">
+            <a:avLst/>
+          </a:prstGeom>
+        </p:spPr>
+      </p:pic>
+      <p:pic>
+        <p:nvPicPr>
+          <p:cNvPr id="25" name="Picture 2" descr="Digital, data and technology - National Highways"/>
+          <p:cNvPicPr>
+            <a:picLocks noChangeAspect="1" noChangeArrowheads="1"/>
+          </p:cNvPicPr>
+          <p:nvPr/>
+        </p:nvPicPr>
+        <p:blipFill>
+          <a:blip r:embed="rId4">
+            <a:extLst>
+              <a:ext uri="{28A0092B-C50C-407E-A947-70E740481C1C}">
+                <a14:useLocalDpi xmlns:a14="http://schemas.microsoft.com/office/drawing/2010/main" val="0"/>
+              </a:ext>
+            </a:extLst>
+          </a:blip>
+          <a:srcRect/>
+          <a:stretch>
+            <a:fillRect/>
+          </a:stretch>
+        </p:blipFill>
+        <p:spPr bwMode="auto">
+          <a:xfrm>
+            <a:off x="4419725" y="822960"/>
+            <a:ext cx="4431667" cy="3810000"/>
+          </a:xfrm>
+          <a:prstGeom prst="rect">
+            <a:avLst/>
+          </a:prstGeom>
+          <a:noFill/>
+          <a:extLst>
+            <a:ext uri="{909E8E84-426E-40DD-AFC4-6F175D3DCCD1}">
+              <a14:hiddenFill xmlns:a14="http://schemas.microsoft.com/office/drawing/2010/main">
+                <a:solidFill>
+                  <a:srgbClr val="FFFFFF"/>
+                </a:solidFill>
+              </a14:hiddenFill>
+            </a:ext>
+          </a:extLst>
+        </p:spPr>
+      </p:pic>
     </p:spTree>
   </p:cSld>
   <p:clrMapOvr>
     <a:masterClrMapping/>
   </p:clrMapOvr>
+  <p:timing>
+    <p:tnLst>
+      <p:par>
+        <p:cTn id="1" dur="indefinite" restart="never" nodeType="tmRoot"/>
+      </p:par>
+    </p:tnLst>
+  </p:timing>
 </p:sld>
 </file>
 
@@ -9824,6 +10529,13 @@
   <p:clrMapOvr>
     <a:masterClrMapping/>
   </p:clrMapOvr>
+  <p:timing>
+    <p:tnLst>
+      <p:par>
+        <p:cTn id="1" dur="indefinite" restart="never" nodeType="tmRoot"/>
+      </p:par>
+    </p:tnLst>
+  </p:timing>
 </p:sld>
 </file>
 
@@ -10563,6 +11275,13 @@
   <p:clrMapOvr>
     <a:masterClrMapping/>
   </p:clrMapOvr>
+  <p:timing>
+    <p:tnLst>
+      <p:par>
+        <p:cTn id="1" dur="indefinite" restart="never" nodeType="tmRoot"/>
+      </p:par>
+    </p:tnLst>
+  </p:timing>
 </p:sld>
 </file>
 
@@ -11178,6 +11897,13 @@
   <p:clrMapOvr>
     <a:masterClrMapping/>
   </p:clrMapOvr>
+  <p:timing>
+    <p:tnLst>
+      <p:par>
+        <p:cTn id="1" dur="indefinite" restart="never" nodeType="tmRoot"/>
+      </p:par>
+    </p:tnLst>
+  </p:timing>
 </p:sld>
 </file>
 

--- a/DR/Защита_Костадин_final (1).pptx
+++ b/DR/Защита_Костадин_final (1).pptx
@@ -523,485 +523,902 @@
           <a:lstStyle/>
           <a:p>
             <a:r>
-              <a:rPr lang="en-US" dirty="0" err="1">
-                <a:highlight>
-                  <a:srgbClr val="FFFFFF"/>
-                </a:highlight>
-              </a:rPr>
-              <a:t>Системите</a:t>
-            </a:r>
-            <a:r>
-              <a:rPr lang="en-US" dirty="0">
-                <a:highlight>
-                  <a:srgbClr val="FFFFFF"/>
-                </a:highlight>
-              </a:rPr>
-              <a:t> </a:t>
-            </a:r>
-            <a:r>
-              <a:rPr lang="en-US" dirty="0" err="1">
-                <a:highlight>
-                  <a:srgbClr val="FFFFFF"/>
-                </a:highlight>
+              <a:rPr lang="en-US" sz="1200" kern="1200" dirty="0" err="1" smtClean="0">
+                <a:solidFill>
+                  <a:schemeClr val="tx1"/>
+                </a:solidFill>
+                <a:effectLst/>
+                <a:latin typeface="+mn-lt"/>
+                <a:ea typeface="+mn-ea"/>
+                <a:cs typeface="+mn-cs"/>
+              </a:rPr>
+              <a:t>Уважаема</a:t>
+            </a:r>
+            <a:r>
+              <a:rPr lang="en-US" sz="1200" kern="1200" dirty="0" smtClean="0">
+                <a:solidFill>
+                  <a:schemeClr val="tx1"/>
+                </a:solidFill>
+                <a:effectLst/>
+                <a:latin typeface="+mn-lt"/>
+                <a:ea typeface="+mn-ea"/>
+                <a:cs typeface="+mn-cs"/>
+              </a:rPr>
+              <a:t> г-</a:t>
+            </a:r>
+            <a:r>
+              <a:rPr lang="en-US" sz="1200" kern="1200" dirty="0" err="1" smtClean="0">
+                <a:solidFill>
+                  <a:schemeClr val="tx1"/>
+                </a:solidFill>
+                <a:effectLst/>
+                <a:latin typeface="+mn-lt"/>
+                <a:ea typeface="+mn-ea"/>
+                <a:cs typeface="+mn-cs"/>
+              </a:rPr>
+              <a:t>жо</a:t>
+            </a:r>
+            <a:r>
+              <a:rPr lang="en-US" sz="1200" kern="1200" dirty="0" smtClean="0">
+                <a:solidFill>
+                  <a:schemeClr val="tx1"/>
+                </a:solidFill>
+                <a:effectLst/>
+                <a:latin typeface="+mn-lt"/>
+                <a:ea typeface="+mn-ea"/>
+                <a:cs typeface="+mn-cs"/>
+              </a:rPr>
+              <a:t> </a:t>
+            </a:r>
+            <a:r>
+              <a:rPr lang="en-US" sz="1200" kern="1200" dirty="0" err="1" smtClean="0">
+                <a:solidFill>
+                  <a:schemeClr val="tx1"/>
+                </a:solidFill>
+                <a:effectLst/>
+                <a:latin typeface="+mn-lt"/>
+                <a:ea typeface="+mn-ea"/>
+                <a:cs typeface="+mn-cs"/>
+              </a:rPr>
+              <a:t>Директор</a:t>
+            </a:r>
+            <a:r>
+              <a:rPr lang="en-US" sz="1200" kern="1200" dirty="0" smtClean="0">
+                <a:solidFill>
+                  <a:schemeClr val="tx1"/>
+                </a:solidFill>
+                <a:effectLst/>
+                <a:latin typeface="+mn-lt"/>
+                <a:ea typeface="+mn-ea"/>
+                <a:cs typeface="+mn-cs"/>
+              </a:rPr>
+              <a:t>, </a:t>
+            </a:r>
+            <a:r>
+              <a:rPr lang="en-US" sz="1200" kern="1200" dirty="0" err="1" smtClean="0">
+                <a:solidFill>
+                  <a:schemeClr val="tx1"/>
+                </a:solidFill>
+                <a:effectLst/>
+                <a:latin typeface="+mn-lt"/>
+                <a:ea typeface="+mn-ea"/>
+                <a:cs typeface="+mn-cs"/>
+              </a:rPr>
+              <a:t>Уважаема</a:t>
+            </a:r>
+            <a:r>
+              <a:rPr lang="en-US" sz="1200" kern="1200" dirty="0" smtClean="0">
+                <a:solidFill>
+                  <a:schemeClr val="tx1"/>
+                </a:solidFill>
+                <a:effectLst/>
+                <a:latin typeface="+mn-lt"/>
+                <a:ea typeface="+mn-ea"/>
+                <a:cs typeface="+mn-cs"/>
+              </a:rPr>
+              <a:t> </a:t>
+            </a:r>
+            <a:r>
+              <a:rPr lang="en-US" sz="1200" kern="1200" dirty="0" err="1" smtClean="0">
+                <a:solidFill>
+                  <a:schemeClr val="tx1"/>
+                </a:solidFill>
+                <a:effectLst/>
+                <a:latin typeface="+mn-lt"/>
+                <a:ea typeface="+mn-ea"/>
+                <a:cs typeface="+mn-cs"/>
+              </a:rPr>
+              <a:t>комисия</a:t>
+            </a:r>
+            <a:r>
+              <a:rPr lang="en-US" sz="1200" kern="1200" dirty="0" smtClean="0">
+                <a:solidFill>
+                  <a:schemeClr val="tx1"/>
+                </a:solidFill>
+                <a:effectLst/>
+                <a:latin typeface="+mn-lt"/>
+                <a:ea typeface="+mn-ea"/>
+                <a:cs typeface="+mn-cs"/>
+              </a:rPr>
+              <a:t>, </a:t>
+            </a:r>
+            <a:r>
+              <a:rPr lang="en-US" sz="1200" kern="1200" dirty="0" err="1" smtClean="0">
+                <a:solidFill>
+                  <a:schemeClr val="tx1"/>
+                </a:solidFill>
+                <a:effectLst/>
+                <a:latin typeface="+mn-lt"/>
+                <a:ea typeface="+mn-ea"/>
+                <a:cs typeface="+mn-cs"/>
+              </a:rPr>
+              <a:t>Уважаеми</a:t>
+            </a:r>
+            <a:r>
+              <a:rPr lang="en-US" sz="1200" kern="1200" dirty="0" smtClean="0">
+                <a:solidFill>
+                  <a:schemeClr val="tx1"/>
+                </a:solidFill>
+                <a:effectLst/>
+                <a:latin typeface="+mn-lt"/>
+                <a:ea typeface="+mn-ea"/>
+                <a:cs typeface="+mn-cs"/>
+              </a:rPr>
+              <a:t> </a:t>
+            </a:r>
+            <a:r>
+              <a:rPr lang="en-US" sz="1200" kern="1200" dirty="0" err="1" smtClean="0">
+                <a:solidFill>
+                  <a:schemeClr val="tx1"/>
+                </a:solidFill>
+                <a:effectLst/>
+                <a:latin typeface="+mn-lt"/>
+                <a:ea typeface="+mn-ea"/>
+                <a:cs typeface="+mn-cs"/>
+              </a:rPr>
+              <a:t>гости</a:t>
+            </a:r>
+            <a:r>
+              <a:rPr lang="en-US" sz="1200" kern="1200" dirty="0" smtClean="0">
+                <a:solidFill>
+                  <a:schemeClr val="tx1"/>
+                </a:solidFill>
+                <a:effectLst/>
+                <a:latin typeface="+mn-lt"/>
+                <a:ea typeface="+mn-ea"/>
+                <a:cs typeface="+mn-cs"/>
+              </a:rPr>
+              <a:t>,</a:t>
+            </a:r>
+            <a:endParaRPr lang="bg-BG" sz="1200" kern="1200" dirty="0" smtClean="0">
+              <a:solidFill>
+                <a:schemeClr val="tx1"/>
+              </a:solidFill>
+              <a:effectLst/>
+              <a:latin typeface="+mn-lt"/>
+              <a:ea typeface="+mn-ea"/>
+              <a:cs typeface="+mn-cs"/>
+            </a:endParaRPr>
+          </a:p>
+          <a:p>
+            <a:r>
+              <a:rPr lang="en-US" sz="1200" kern="1200" dirty="0" err="1" smtClean="0">
+                <a:solidFill>
+                  <a:schemeClr val="tx1"/>
+                </a:solidFill>
+                <a:effectLst/>
+                <a:latin typeface="+mn-lt"/>
+                <a:ea typeface="+mn-ea"/>
+                <a:cs typeface="+mn-cs"/>
+              </a:rPr>
+              <a:t>Аз</a:t>
+            </a:r>
+            <a:r>
+              <a:rPr lang="en-US" sz="1200" kern="1200" dirty="0" smtClean="0">
+                <a:solidFill>
+                  <a:schemeClr val="tx1"/>
+                </a:solidFill>
+                <a:effectLst/>
+                <a:latin typeface="+mn-lt"/>
+                <a:ea typeface="+mn-ea"/>
+                <a:cs typeface="+mn-cs"/>
+              </a:rPr>
+              <a:t> </a:t>
+            </a:r>
+            <a:r>
+              <a:rPr lang="en-US" sz="1200" kern="1200" dirty="0" err="1" smtClean="0">
+                <a:solidFill>
+                  <a:schemeClr val="tx1"/>
+                </a:solidFill>
+                <a:effectLst/>
+                <a:latin typeface="+mn-lt"/>
+                <a:ea typeface="+mn-ea"/>
+                <a:cs typeface="+mn-cs"/>
+              </a:rPr>
+              <a:t>съм</a:t>
+            </a:r>
+            <a:r>
+              <a:rPr lang="en-US" sz="1200" kern="1200" dirty="0" smtClean="0">
+                <a:solidFill>
+                  <a:schemeClr val="tx1"/>
+                </a:solidFill>
+                <a:effectLst/>
+                <a:latin typeface="+mn-lt"/>
+                <a:ea typeface="+mn-ea"/>
+                <a:cs typeface="+mn-cs"/>
+              </a:rPr>
+              <a:t> </a:t>
+            </a:r>
+            <a:r>
+              <a:rPr lang="en-US" sz="1200" kern="1200" dirty="0" err="1" smtClean="0">
+                <a:solidFill>
+                  <a:schemeClr val="tx1"/>
+                </a:solidFill>
+                <a:effectLst/>
+                <a:latin typeface="+mn-lt"/>
+                <a:ea typeface="+mn-ea"/>
+                <a:cs typeface="+mn-cs"/>
+              </a:rPr>
+              <a:t>Костадин</a:t>
+            </a:r>
+            <a:r>
+              <a:rPr lang="en-US" sz="1200" kern="1200" dirty="0" smtClean="0">
+                <a:solidFill>
+                  <a:schemeClr val="tx1"/>
+                </a:solidFill>
+                <a:effectLst/>
+                <a:latin typeface="+mn-lt"/>
+                <a:ea typeface="+mn-ea"/>
+                <a:cs typeface="+mn-cs"/>
+              </a:rPr>
+              <a:t> </a:t>
+            </a:r>
+            <a:r>
+              <a:rPr lang="en-US" sz="1200" kern="1200" dirty="0" err="1" smtClean="0">
+                <a:solidFill>
+                  <a:schemeClr val="tx1"/>
+                </a:solidFill>
+                <a:effectLst/>
+                <a:latin typeface="+mn-lt"/>
+                <a:ea typeface="+mn-ea"/>
+                <a:cs typeface="+mn-cs"/>
+              </a:rPr>
+              <a:t>Димитров</a:t>
+            </a:r>
+            <a:r>
+              <a:rPr lang="en-US" sz="1200" kern="1200" dirty="0" smtClean="0">
+                <a:solidFill>
+                  <a:schemeClr val="tx1"/>
+                </a:solidFill>
+                <a:effectLst/>
+                <a:latin typeface="+mn-lt"/>
+                <a:ea typeface="+mn-ea"/>
+                <a:cs typeface="+mn-cs"/>
+              </a:rPr>
+              <a:t> </a:t>
+            </a:r>
+            <a:r>
+              <a:rPr lang="en-US" sz="1200" kern="1200" dirty="0" err="1" smtClean="0">
+                <a:solidFill>
+                  <a:schemeClr val="tx1"/>
+                </a:solidFill>
+                <a:effectLst/>
+                <a:latin typeface="+mn-lt"/>
+                <a:ea typeface="+mn-ea"/>
+                <a:cs typeface="+mn-cs"/>
+              </a:rPr>
+              <a:t>Пидов</a:t>
+            </a:r>
+            <a:r>
+              <a:rPr lang="en-US" sz="1200" kern="1200" dirty="0" smtClean="0">
+                <a:solidFill>
+                  <a:schemeClr val="tx1"/>
+                </a:solidFill>
+                <a:effectLst/>
+                <a:latin typeface="+mn-lt"/>
+                <a:ea typeface="+mn-ea"/>
+                <a:cs typeface="+mn-cs"/>
+              </a:rPr>
+              <a:t>.</a:t>
+            </a:r>
+            <a:endParaRPr lang="bg-BG" sz="1200" kern="1200" dirty="0" smtClean="0">
+              <a:solidFill>
+                <a:schemeClr val="tx1"/>
+              </a:solidFill>
+              <a:effectLst/>
+              <a:latin typeface="+mn-lt"/>
+              <a:ea typeface="+mn-ea"/>
+              <a:cs typeface="+mn-cs"/>
+            </a:endParaRPr>
+          </a:p>
+          <a:p>
+            <a:r>
+              <a:rPr lang="en-US" sz="1200" kern="1200" dirty="0" err="1" smtClean="0">
+                <a:solidFill>
+                  <a:schemeClr val="tx1"/>
+                </a:solidFill>
+                <a:effectLst/>
+                <a:latin typeface="+mn-lt"/>
+                <a:ea typeface="+mn-ea"/>
+                <a:cs typeface="+mn-cs"/>
+              </a:rPr>
+              <a:t>Темата</a:t>
+            </a:r>
+            <a:r>
+              <a:rPr lang="en-US" sz="1200" kern="1200" dirty="0" smtClean="0">
+                <a:solidFill>
+                  <a:schemeClr val="tx1"/>
+                </a:solidFill>
+                <a:effectLst/>
+                <a:latin typeface="+mn-lt"/>
+                <a:ea typeface="+mn-ea"/>
+                <a:cs typeface="+mn-cs"/>
+              </a:rPr>
+              <a:t> </a:t>
+            </a:r>
+            <a:r>
+              <a:rPr lang="en-US" sz="1200" kern="1200" dirty="0" err="1" smtClean="0">
+                <a:solidFill>
+                  <a:schemeClr val="tx1"/>
+                </a:solidFill>
+                <a:effectLst/>
+                <a:latin typeface="+mn-lt"/>
+                <a:ea typeface="+mn-ea"/>
+                <a:cs typeface="+mn-cs"/>
+              </a:rPr>
+              <a:t>на</a:t>
+            </a:r>
+            <a:r>
+              <a:rPr lang="en-US" sz="1200" kern="1200" dirty="0" smtClean="0">
+                <a:solidFill>
+                  <a:schemeClr val="tx1"/>
+                </a:solidFill>
+                <a:effectLst/>
+                <a:latin typeface="+mn-lt"/>
+                <a:ea typeface="+mn-ea"/>
+                <a:cs typeface="+mn-cs"/>
+              </a:rPr>
+              <a:t> </a:t>
+            </a:r>
+            <a:r>
+              <a:rPr lang="en-US" sz="1200" kern="1200" dirty="0" err="1" smtClean="0">
+                <a:solidFill>
+                  <a:schemeClr val="tx1"/>
+                </a:solidFill>
+                <a:effectLst/>
+                <a:latin typeface="+mn-lt"/>
+                <a:ea typeface="+mn-ea"/>
+                <a:cs typeface="+mn-cs"/>
+              </a:rPr>
+              <a:t>моят</a:t>
+            </a:r>
+            <a:r>
+              <a:rPr lang="en-US" sz="1200" kern="1200" dirty="0" smtClean="0">
+                <a:solidFill>
+                  <a:schemeClr val="tx1"/>
+                </a:solidFill>
+                <a:effectLst/>
+                <a:latin typeface="+mn-lt"/>
+                <a:ea typeface="+mn-ea"/>
+                <a:cs typeface="+mn-cs"/>
+              </a:rPr>
+              <a:t> </a:t>
+            </a:r>
+            <a:r>
+              <a:rPr lang="en-US" sz="1200" kern="1200" dirty="0" err="1" smtClean="0">
+                <a:solidFill>
+                  <a:schemeClr val="tx1"/>
+                </a:solidFill>
+                <a:effectLst/>
+                <a:latin typeface="+mn-lt"/>
+                <a:ea typeface="+mn-ea"/>
+                <a:cs typeface="+mn-cs"/>
+              </a:rPr>
+              <a:t>дипломен</a:t>
+            </a:r>
+            <a:r>
+              <a:rPr lang="en-US" sz="1200" kern="1200" dirty="0" smtClean="0">
+                <a:solidFill>
+                  <a:schemeClr val="tx1"/>
+                </a:solidFill>
+                <a:effectLst/>
+                <a:latin typeface="+mn-lt"/>
+                <a:ea typeface="+mn-ea"/>
+                <a:cs typeface="+mn-cs"/>
+              </a:rPr>
+              <a:t> </a:t>
+            </a:r>
+            <a:r>
+              <a:rPr lang="en-US" sz="1200" kern="1200" dirty="0" err="1" smtClean="0">
+                <a:solidFill>
+                  <a:schemeClr val="tx1"/>
+                </a:solidFill>
+                <a:effectLst/>
+                <a:latin typeface="+mn-lt"/>
+                <a:ea typeface="+mn-ea"/>
+                <a:cs typeface="+mn-cs"/>
+              </a:rPr>
+              <a:t>проект</a:t>
+            </a:r>
+            <a:r>
+              <a:rPr lang="en-US" sz="1200" kern="1200" dirty="0" smtClean="0">
+                <a:solidFill>
+                  <a:schemeClr val="tx1"/>
+                </a:solidFill>
+                <a:effectLst/>
+                <a:latin typeface="+mn-lt"/>
+                <a:ea typeface="+mn-ea"/>
+                <a:cs typeface="+mn-cs"/>
+              </a:rPr>
+              <a:t> е „</a:t>
+            </a:r>
+            <a:r>
+              <a:rPr lang="en-US" sz="1200" kern="1200" dirty="0" err="1" smtClean="0">
+                <a:solidFill>
+                  <a:schemeClr val="tx1"/>
+                </a:solidFill>
+                <a:effectLst/>
+                <a:latin typeface="+mn-lt"/>
+                <a:ea typeface="+mn-ea"/>
+                <a:cs typeface="+mn-cs"/>
+              </a:rPr>
+              <a:t>Уеб-базирана</a:t>
+            </a:r>
+            <a:r>
+              <a:rPr lang="en-US" sz="1200" kern="1200" dirty="0" smtClean="0">
+                <a:solidFill>
+                  <a:schemeClr val="tx1"/>
+                </a:solidFill>
+                <a:effectLst/>
+                <a:latin typeface="+mn-lt"/>
+                <a:ea typeface="+mn-ea"/>
+                <a:cs typeface="+mn-cs"/>
+              </a:rPr>
+              <a:t> </a:t>
+            </a:r>
+            <a:r>
+              <a:rPr lang="en-US" sz="1200" kern="1200" dirty="0" err="1" smtClean="0">
+                <a:solidFill>
+                  <a:schemeClr val="tx1"/>
+                </a:solidFill>
+                <a:effectLst/>
+                <a:latin typeface="+mn-lt"/>
+                <a:ea typeface="+mn-ea"/>
+                <a:cs typeface="+mn-cs"/>
+              </a:rPr>
+              <a:t>система</a:t>
+            </a:r>
+            <a:r>
+              <a:rPr lang="en-US" sz="1200" kern="1200" dirty="0" smtClean="0">
+                <a:solidFill>
+                  <a:schemeClr val="tx1"/>
+                </a:solidFill>
+                <a:effectLst/>
+                <a:latin typeface="+mn-lt"/>
+                <a:ea typeface="+mn-ea"/>
+                <a:cs typeface="+mn-cs"/>
+              </a:rPr>
+              <a:t> </a:t>
+            </a:r>
+            <a:r>
+              <a:rPr lang="en-US" sz="1200" kern="1200" dirty="0" err="1" smtClean="0">
+                <a:solidFill>
+                  <a:schemeClr val="tx1"/>
+                </a:solidFill>
+                <a:effectLst/>
+                <a:latin typeface="+mn-lt"/>
+                <a:ea typeface="+mn-ea"/>
+                <a:cs typeface="+mn-cs"/>
               </a:rPr>
               <a:t>за</a:t>
             </a:r>
             <a:r>
-              <a:rPr lang="en-US" dirty="0">
-                <a:highlight>
-                  <a:srgbClr val="FFFFFF"/>
-                </a:highlight>
-              </a:rPr>
-              <a:t> </a:t>
-            </a:r>
-            <a:r>
-              <a:rPr lang="en-US" dirty="0" err="1">
-                <a:highlight>
-                  <a:srgbClr val="FFFFFF"/>
-                </a:highlight>
+              <a:rPr lang="en-US" sz="1200" kern="1200" dirty="0" smtClean="0">
+                <a:solidFill>
+                  <a:schemeClr val="tx1"/>
+                </a:solidFill>
+                <a:effectLst/>
+                <a:latin typeface="+mn-lt"/>
+                <a:ea typeface="+mn-ea"/>
+                <a:cs typeface="+mn-cs"/>
+              </a:rPr>
+              <a:t> </a:t>
+            </a:r>
+            <a:r>
+              <a:rPr lang="en-US" sz="1200" kern="1200" dirty="0" err="1" smtClean="0">
+                <a:solidFill>
+                  <a:schemeClr val="tx1"/>
+                </a:solidFill>
+                <a:effectLst/>
+                <a:latin typeface="+mn-lt"/>
+                <a:ea typeface="+mn-ea"/>
+                <a:cs typeface="+mn-cs"/>
               </a:rPr>
               <a:t>видеонаблюдение</a:t>
             </a:r>
             <a:r>
-              <a:rPr lang="en-US" dirty="0">
-                <a:highlight>
-                  <a:srgbClr val="FFFFFF"/>
-                </a:highlight>
-              </a:rPr>
-              <a:t> </a:t>
-            </a:r>
-            <a:r>
-              <a:rPr lang="en-US" dirty="0" err="1">
-                <a:highlight>
-                  <a:srgbClr val="FFFFFF"/>
-                </a:highlight>
-              </a:rPr>
-              <a:t>намират</a:t>
-            </a:r>
-            <a:r>
-              <a:rPr lang="en-US" dirty="0">
-                <a:highlight>
-                  <a:srgbClr val="FFFFFF"/>
-                </a:highlight>
-              </a:rPr>
-              <a:t> </a:t>
-            </a:r>
-            <a:r>
-              <a:rPr lang="en-US" dirty="0" err="1">
-                <a:highlight>
-                  <a:srgbClr val="FFFFFF"/>
-                </a:highlight>
-              </a:rPr>
-              <a:t>широко</a:t>
-            </a:r>
-            <a:r>
-              <a:rPr lang="en-US" dirty="0">
-                <a:highlight>
-                  <a:srgbClr val="FFFFFF"/>
-                </a:highlight>
-              </a:rPr>
-              <a:t> </a:t>
-            </a:r>
-            <a:r>
-              <a:rPr lang="en-US" dirty="0" err="1">
-                <a:highlight>
-                  <a:srgbClr val="FFFFFF"/>
-                </a:highlight>
+              <a:rPr lang="en-US" sz="1200" kern="1200" dirty="0" smtClean="0">
+                <a:solidFill>
+                  <a:schemeClr val="tx1"/>
+                </a:solidFill>
+                <a:effectLst/>
+                <a:latin typeface="+mn-lt"/>
+                <a:ea typeface="+mn-ea"/>
+                <a:cs typeface="+mn-cs"/>
+              </a:rPr>
+              <a:t> с </a:t>
+            </a:r>
+            <a:r>
+              <a:rPr lang="en-US" sz="1200" kern="1200" dirty="0" err="1" smtClean="0">
+                <a:solidFill>
+                  <a:schemeClr val="tx1"/>
+                </a:solidFill>
+                <a:effectLst/>
+                <a:latin typeface="+mn-lt"/>
+                <a:ea typeface="+mn-ea"/>
+                <a:cs typeface="+mn-cs"/>
+              </a:rPr>
+              <a:t>детекция</a:t>
+            </a:r>
+            <a:r>
+              <a:rPr lang="en-US" sz="1200" kern="1200" dirty="0" smtClean="0">
+                <a:solidFill>
+                  <a:schemeClr val="tx1"/>
+                </a:solidFill>
+                <a:effectLst/>
+                <a:latin typeface="+mn-lt"/>
+                <a:ea typeface="+mn-ea"/>
+                <a:cs typeface="+mn-cs"/>
+              </a:rPr>
+              <a:t> </a:t>
+            </a:r>
+            <a:r>
+              <a:rPr lang="en-US" sz="1200" kern="1200" dirty="0" err="1" smtClean="0">
+                <a:solidFill>
+                  <a:schemeClr val="tx1"/>
+                </a:solidFill>
+                <a:effectLst/>
+                <a:latin typeface="+mn-lt"/>
+                <a:ea typeface="+mn-ea"/>
+                <a:cs typeface="+mn-cs"/>
+              </a:rPr>
+              <a:t>на</a:t>
+            </a:r>
+            <a:r>
+              <a:rPr lang="en-US" sz="1200" kern="1200" dirty="0" smtClean="0">
+                <a:solidFill>
+                  <a:schemeClr val="tx1"/>
+                </a:solidFill>
+                <a:effectLst/>
+                <a:latin typeface="+mn-lt"/>
+                <a:ea typeface="+mn-ea"/>
+                <a:cs typeface="+mn-cs"/>
+              </a:rPr>
+              <a:t> </a:t>
+            </a:r>
+            <a:r>
+              <a:rPr lang="en-US" sz="1200" kern="1200" dirty="0" err="1" smtClean="0">
+                <a:solidFill>
+                  <a:schemeClr val="tx1"/>
+                </a:solidFill>
+                <a:effectLst/>
+                <a:latin typeface="+mn-lt"/>
+                <a:ea typeface="+mn-ea"/>
+                <a:cs typeface="+mn-cs"/>
+              </a:rPr>
+              <a:t>движение</a:t>
+            </a:r>
+            <a:r>
+              <a:rPr lang="en-US" sz="1200" kern="1200" dirty="0" smtClean="0">
+                <a:solidFill>
+                  <a:schemeClr val="tx1"/>
+                </a:solidFill>
+                <a:effectLst/>
+                <a:latin typeface="+mn-lt"/>
+                <a:ea typeface="+mn-ea"/>
+                <a:cs typeface="+mn-cs"/>
+              </a:rPr>
+              <a:t>“ — </a:t>
+            </a:r>
+            <a:r>
+              <a:rPr lang="en-US" sz="1200" kern="1200" dirty="0" err="1" smtClean="0">
+                <a:solidFill>
+                  <a:schemeClr val="tx1"/>
+                </a:solidFill>
+                <a:effectLst/>
+                <a:latin typeface="+mn-lt"/>
+                <a:ea typeface="+mn-ea"/>
+                <a:cs typeface="+mn-cs"/>
+              </a:rPr>
+              <a:t>уеб</a:t>
+            </a:r>
+            <a:r>
+              <a:rPr lang="en-US" sz="1200" kern="1200" dirty="0" smtClean="0">
+                <a:solidFill>
+                  <a:schemeClr val="tx1"/>
+                </a:solidFill>
+                <a:effectLst/>
+                <a:latin typeface="+mn-lt"/>
+                <a:ea typeface="+mn-ea"/>
+                <a:cs typeface="+mn-cs"/>
+              </a:rPr>
+              <a:t> </a:t>
+            </a:r>
+            <a:r>
+              <a:rPr lang="en-US" sz="1200" kern="1200" dirty="0" err="1" smtClean="0">
+                <a:solidFill>
+                  <a:schemeClr val="tx1"/>
+                </a:solidFill>
+                <a:effectLst/>
+                <a:latin typeface="+mn-lt"/>
+                <a:ea typeface="+mn-ea"/>
+                <a:cs typeface="+mn-cs"/>
               </a:rPr>
               <a:t>приложение</a:t>
             </a:r>
             <a:r>
-              <a:rPr lang="en-US" dirty="0">
-                <a:highlight>
-                  <a:srgbClr val="FFFFFF"/>
-                </a:highlight>
-              </a:rPr>
-              <a:t> в </a:t>
-            </a:r>
-            <a:r>
-              <a:rPr lang="en-US" dirty="0" err="1">
-                <a:highlight>
-                  <a:srgbClr val="FFFFFF"/>
-                </a:highlight>
-              </a:rPr>
-              <a:t>съвременния</a:t>
-            </a:r>
-            <a:r>
-              <a:rPr lang="en-US" dirty="0">
-                <a:highlight>
-                  <a:srgbClr val="FFFFFF"/>
-                </a:highlight>
-              </a:rPr>
-              <a:t> </a:t>
-            </a:r>
-            <a:r>
-              <a:rPr lang="en-US" dirty="0" err="1">
-                <a:highlight>
-                  <a:srgbClr val="FFFFFF"/>
-                </a:highlight>
-              </a:rPr>
-              <a:t>свят</a:t>
-            </a:r>
-            <a:r>
-              <a:rPr lang="en-US" dirty="0">
-                <a:highlight>
-                  <a:srgbClr val="FFFFFF"/>
-                </a:highlight>
-              </a:rPr>
-              <a:t>. Уеб </a:t>
-            </a:r>
-            <a:r>
-              <a:rPr lang="en-US" dirty="0" err="1">
-                <a:highlight>
-                  <a:srgbClr val="FFFFFF"/>
-                </a:highlight>
-              </a:rPr>
-              <a:t>технологиите</a:t>
-            </a:r>
-            <a:r>
-              <a:rPr lang="en-US" dirty="0">
-                <a:highlight>
-                  <a:srgbClr val="FFFFFF"/>
-                </a:highlight>
-              </a:rPr>
-              <a:t> </a:t>
-            </a:r>
-            <a:r>
-              <a:rPr lang="en-US" dirty="0" err="1">
-                <a:highlight>
-                  <a:srgbClr val="FFFFFF"/>
-                </a:highlight>
-              </a:rPr>
-              <a:t>позволяват</a:t>
-            </a:r>
-            <a:r>
-              <a:rPr lang="en-US" dirty="0">
-                <a:highlight>
-                  <a:srgbClr val="FFFFFF"/>
-                </a:highlight>
-              </a:rPr>
-              <a:t> </a:t>
-            </a:r>
-            <a:r>
-              <a:rPr lang="en-US" dirty="0" err="1">
-                <a:highlight>
-                  <a:srgbClr val="FFFFFF"/>
-                </a:highlight>
-              </a:rPr>
-              <a:t>достъп</a:t>
-            </a:r>
-            <a:r>
-              <a:rPr lang="en-US" dirty="0">
-                <a:highlight>
-                  <a:srgbClr val="FFFFFF"/>
-                </a:highlight>
-              </a:rPr>
-              <a:t> </a:t>
-            </a:r>
-            <a:r>
-              <a:rPr lang="en-US" dirty="0" err="1">
-                <a:highlight>
-                  <a:srgbClr val="FFFFFF"/>
-                </a:highlight>
-              </a:rPr>
-              <a:t>директно</a:t>
-            </a:r>
-            <a:r>
-              <a:rPr lang="en-US" dirty="0">
-                <a:highlight>
-                  <a:srgbClr val="FFFFFF"/>
-                </a:highlight>
-              </a:rPr>
-              <a:t> </a:t>
-            </a:r>
-            <a:r>
-              <a:rPr lang="en-US" dirty="0" err="1">
-                <a:highlight>
-                  <a:srgbClr val="FFFFFF"/>
-                </a:highlight>
-              </a:rPr>
-              <a:t>през</a:t>
-            </a:r>
-            <a:r>
-              <a:rPr lang="en-US" dirty="0">
-                <a:highlight>
-                  <a:srgbClr val="FFFFFF"/>
-                </a:highlight>
-              </a:rPr>
-              <a:t> </a:t>
-            </a:r>
-            <a:r>
-              <a:rPr lang="en-US" dirty="0" err="1">
-                <a:highlight>
-                  <a:srgbClr val="FFFFFF"/>
-                </a:highlight>
-              </a:rPr>
-              <a:t>браузър</a:t>
-            </a:r>
-            <a:r>
-              <a:rPr lang="en-US" dirty="0">
-                <a:highlight>
-                  <a:srgbClr val="FFFFFF"/>
-                </a:highlight>
-              </a:rPr>
-              <a:t>, </a:t>
-            </a:r>
-            <a:r>
-              <a:rPr lang="en-US" dirty="0" err="1">
-                <a:highlight>
-                  <a:srgbClr val="FFFFFF"/>
-                </a:highlight>
-              </a:rPr>
-              <a:t>без</a:t>
-            </a:r>
-            <a:r>
-              <a:rPr lang="en-US" dirty="0">
-                <a:highlight>
-                  <a:srgbClr val="FFFFFF"/>
-                </a:highlight>
-              </a:rPr>
-              <a:t> </a:t>
-            </a:r>
-            <a:r>
-              <a:rPr lang="en-US" dirty="0" err="1">
-                <a:highlight>
-                  <a:srgbClr val="FFFFFF"/>
-                </a:highlight>
-              </a:rPr>
-              <a:t>допълнителен</a:t>
-            </a:r>
-            <a:r>
-              <a:rPr lang="en-US" dirty="0">
-                <a:highlight>
-                  <a:srgbClr val="FFFFFF"/>
-                </a:highlight>
-              </a:rPr>
-              <a:t> </a:t>
-            </a:r>
-            <a:r>
-              <a:rPr lang="en-US" dirty="0" err="1">
-                <a:highlight>
-                  <a:srgbClr val="FFFFFF"/>
-                </a:highlight>
-              </a:rPr>
-              <a:t>софтуер</a:t>
-            </a:r>
-            <a:r>
-              <a:rPr lang="en-US" dirty="0">
-                <a:highlight>
-                  <a:srgbClr val="FFFFFF"/>
-                </a:highlight>
-              </a:rPr>
-              <a:t> </a:t>
-            </a:r>
-            <a:r>
-              <a:rPr lang="en-US" dirty="0" err="1">
-                <a:highlight>
-                  <a:srgbClr val="FFFFFF"/>
-                </a:highlight>
-              </a:rPr>
-              <a:t>или</a:t>
-            </a:r>
-            <a:r>
-              <a:rPr lang="en-US" dirty="0">
-                <a:highlight>
-                  <a:srgbClr val="FFFFFF"/>
-                </a:highlight>
-              </a:rPr>
-              <a:t> </a:t>
-            </a:r>
-            <a:r>
-              <a:rPr lang="en-US" dirty="0" err="1">
-                <a:highlight>
-                  <a:srgbClr val="FFFFFF"/>
-                </a:highlight>
-              </a:rPr>
-              <a:t>хардуер</a:t>
-            </a:r>
-            <a:r>
-              <a:rPr lang="en-US" dirty="0">
-                <a:highlight>
-                  <a:srgbClr val="FFFFFF"/>
-                </a:highlight>
-              </a:rPr>
-              <a:t>. Това </a:t>
-            </a:r>
-            <a:r>
-              <a:rPr lang="en-US" dirty="0" err="1">
-                <a:highlight>
-                  <a:srgbClr val="FFFFFF"/>
-                </a:highlight>
-              </a:rPr>
-              <a:t>ги</a:t>
-            </a:r>
-            <a:r>
-              <a:rPr lang="en-US" dirty="0">
-                <a:highlight>
-                  <a:srgbClr val="FFFFFF"/>
-                </a:highlight>
-              </a:rPr>
-              <a:t> </a:t>
-            </a:r>
-            <a:r>
-              <a:rPr lang="en-US" dirty="0" err="1">
-                <a:highlight>
-                  <a:srgbClr val="FFFFFF"/>
-                </a:highlight>
-              </a:rPr>
-              <a:t>прави</a:t>
-            </a:r>
-            <a:r>
-              <a:rPr lang="en-US" dirty="0">
-                <a:highlight>
-                  <a:srgbClr val="FFFFFF"/>
-                </a:highlight>
-              </a:rPr>
-              <a:t> </a:t>
-            </a:r>
-            <a:r>
-              <a:rPr lang="en-US" dirty="0" err="1">
-                <a:highlight>
-                  <a:srgbClr val="FFFFFF"/>
-                </a:highlight>
-              </a:rPr>
-              <a:t>особено</a:t>
-            </a:r>
-            <a:r>
-              <a:rPr lang="en-US" dirty="0">
-                <a:highlight>
-                  <a:srgbClr val="FFFFFF"/>
-                </a:highlight>
-              </a:rPr>
-              <a:t> </a:t>
-            </a:r>
-            <a:r>
-              <a:rPr lang="en-US" dirty="0" err="1">
-                <a:highlight>
-                  <a:srgbClr val="FFFFFF"/>
-                </a:highlight>
-              </a:rPr>
-              <a:t>подходящи</a:t>
-            </a:r>
-            <a:r>
-              <a:rPr lang="en-US" dirty="0">
-                <a:highlight>
-                  <a:srgbClr val="FFFFFF"/>
-                </a:highlight>
-              </a:rPr>
-              <a:t> </a:t>
-            </a:r>
-            <a:r>
-              <a:rPr lang="en-US" dirty="0" err="1">
-                <a:highlight>
-                  <a:srgbClr val="FFFFFF"/>
-                </a:highlight>
+              <a:rPr lang="en-US" sz="1200" kern="1200" dirty="0" smtClean="0">
+                <a:solidFill>
+                  <a:schemeClr val="tx1"/>
+                </a:solidFill>
+                <a:effectLst/>
+                <a:latin typeface="+mn-lt"/>
+                <a:ea typeface="+mn-ea"/>
+                <a:cs typeface="+mn-cs"/>
+              </a:rPr>
+              <a:t> </a:t>
+            </a:r>
+            <a:r>
+              <a:rPr lang="en-US" sz="1200" kern="1200" dirty="0" err="1" smtClean="0">
+                <a:solidFill>
+                  <a:schemeClr val="tx1"/>
+                </a:solidFill>
+                <a:effectLst/>
+                <a:latin typeface="+mn-lt"/>
+                <a:ea typeface="+mn-ea"/>
+                <a:cs typeface="+mn-cs"/>
               </a:rPr>
               <a:t>за</a:t>
             </a:r>
             <a:r>
-              <a:rPr lang="en-US" dirty="0">
-                <a:highlight>
-                  <a:srgbClr val="FFFFFF"/>
-                </a:highlight>
-              </a:rPr>
-              <a:t> </a:t>
-            </a:r>
-            <a:r>
-              <a:rPr lang="en-US" dirty="0" err="1">
-                <a:highlight>
-                  <a:srgbClr val="FFFFFF"/>
-                </a:highlight>
-              </a:rPr>
-              <a:t>домашна</a:t>
-            </a:r>
-            <a:r>
-              <a:rPr lang="en-US" dirty="0">
-                <a:highlight>
-                  <a:srgbClr val="FFFFFF"/>
-                </a:highlight>
-              </a:rPr>
-              <a:t> </a:t>
-            </a:r>
-            <a:r>
-              <a:rPr lang="en-US" dirty="0" err="1">
-                <a:highlight>
-                  <a:srgbClr val="FFFFFF"/>
-                </a:highlight>
-              </a:rPr>
-              <a:t>употреба</a:t>
-            </a:r>
-            <a:r>
-              <a:rPr lang="en-US" dirty="0">
-                <a:highlight>
-                  <a:srgbClr val="FFFFFF"/>
-                </a:highlight>
-              </a:rPr>
-              <a:t>, </a:t>
-            </a:r>
-            <a:r>
-              <a:rPr lang="en-US" dirty="0" err="1">
-                <a:highlight>
-                  <a:srgbClr val="FFFFFF"/>
-                </a:highlight>
-              </a:rPr>
-              <a:t>малкия</a:t>
-            </a:r>
-            <a:r>
-              <a:rPr lang="en-US" dirty="0">
-                <a:highlight>
-                  <a:srgbClr val="FFFFFF"/>
-                </a:highlight>
-              </a:rPr>
-              <a:t> </a:t>
-            </a:r>
-            <a:r>
-              <a:rPr lang="en-US" dirty="0" err="1">
-                <a:highlight>
-                  <a:srgbClr val="FFFFFF"/>
-                </a:highlight>
-              </a:rPr>
-              <a:t>бизнес</a:t>
-            </a:r>
-            <a:r>
-              <a:rPr lang="en-US" dirty="0">
-                <a:highlight>
-                  <a:srgbClr val="FFFFFF"/>
-                </a:highlight>
-              </a:rPr>
-              <a:t> и </a:t>
-            </a:r>
-            <a:r>
-              <a:rPr lang="en-US" dirty="0" err="1">
-                <a:highlight>
-                  <a:srgbClr val="FFFFFF"/>
-                </a:highlight>
-              </a:rPr>
-              <a:t>образователни</a:t>
-            </a:r>
-            <a:r>
-              <a:rPr lang="en-US" dirty="0">
-                <a:highlight>
-                  <a:srgbClr val="FFFFFF"/>
-                </a:highlight>
-              </a:rPr>
-              <a:t> </a:t>
-            </a:r>
-            <a:r>
-              <a:rPr lang="en-US" dirty="0" err="1" smtClean="0">
-                <a:highlight>
-                  <a:srgbClr val="FFFFFF"/>
-                </a:highlight>
-              </a:rPr>
-              <a:t>институц</a:t>
-            </a:r>
-            <a:r>
-              <a:rPr lang="bg-BG" dirty="0" smtClean="0">
-                <a:highlight>
-                  <a:srgbClr val="FFFFFF"/>
-                </a:highlight>
-              </a:rPr>
-              <a:t>ии.</a:t>
-            </a:r>
+              <a:rPr lang="en-US" sz="1200" kern="1200" dirty="0" smtClean="0">
+                <a:solidFill>
+                  <a:schemeClr val="tx1"/>
+                </a:solidFill>
+                <a:effectLst/>
+                <a:latin typeface="+mn-lt"/>
+                <a:ea typeface="+mn-ea"/>
+                <a:cs typeface="+mn-cs"/>
+              </a:rPr>
+              <a:t> </a:t>
+            </a:r>
+            <a:r>
+              <a:rPr lang="en-US" sz="1200" kern="1200" dirty="0" err="1" smtClean="0">
+                <a:solidFill>
+                  <a:schemeClr val="tx1"/>
+                </a:solidFill>
+                <a:effectLst/>
+                <a:latin typeface="+mn-lt"/>
+                <a:ea typeface="+mn-ea"/>
+                <a:cs typeface="+mn-cs"/>
+              </a:rPr>
+              <a:t>наблюдение</a:t>
+            </a:r>
+            <a:r>
+              <a:rPr lang="en-US" sz="1200" kern="1200" dirty="0" smtClean="0">
+                <a:solidFill>
+                  <a:schemeClr val="tx1"/>
+                </a:solidFill>
+                <a:effectLst/>
+                <a:latin typeface="+mn-lt"/>
+                <a:ea typeface="+mn-ea"/>
+                <a:cs typeface="+mn-cs"/>
+              </a:rPr>
+              <a:t> в </a:t>
+            </a:r>
+            <a:r>
+              <a:rPr lang="en-US" sz="1200" kern="1200" dirty="0" err="1" smtClean="0">
+                <a:solidFill>
+                  <a:schemeClr val="tx1"/>
+                </a:solidFill>
+                <a:effectLst/>
+                <a:latin typeface="+mn-lt"/>
+                <a:ea typeface="+mn-ea"/>
+                <a:cs typeface="+mn-cs"/>
+              </a:rPr>
+              <a:t>реално</a:t>
+            </a:r>
+            <a:r>
+              <a:rPr lang="en-US" sz="1200" kern="1200" dirty="0" smtClean="0">
+                <a:solidFill>
+                  <a:schemeClr val="tx1"/>
+                </a:solidFill>
+                <a:effectLst/>
+                <a:latin typeface="+mn-lt"/>
+                <a:ea typeface="+mn-ea"/>
+                <a:cs typeface="+mn-cs"/>
+              </a:rPr>
+              <a:t> </a:t>
+            </a:r>
+            <a:r>
+              <a:rPr lang="en-US" sz="1200" kern="1200" dirty="0" err="1" smtClean="0">
+                <a:solidFill>
+                  <a:schemeClr val="tx1"/>
+                </a:solidFill>
+                <a:effectLst/>
+                <a:latin typeface="+mn-lt"/>
+                <a:ea typeface="+mn-ea"/>
+                <a:cs typeface="+mn-cs"/>
+              </a:rPr>
+              <a:t>време</a:t>
+            </a:r>
+            <a:r>
+              <a:rPr lang="en-US" sz="1200" kern="1200" dirty="0" smtClean="0">
+                <a:solidFill>
+                  <a:schemeClr val="tx1"/>
+                </a:solidFill>
+                <a:effectLst/>
+                <a:latin typeface="+mn-lt"/>
+                <a:ea typeface="+mn-ea"/>
+                <a:cs typeface="+mn-cs"/>
+              </a:rPr>
+              <a:t> с </a:t>
+            </a:r>
+            <a:r>
+              <a:rPr lang="en-US" sz="1200" kern="1200" dirty="0" err="1" smtClean="0">
+                <a:solidFill>
+                  <a:schemeClr val="tx1"/>
+                </a:solidFill>
+                <a:effectLst/>
+                <a:latin typeface="+mn-lt"/>
+                <a:ea typeface="+mn-ea"/>
+                <a:cs typeface="+mn-cs"/>
+              </a:rPr>
+              <a:t>автоматично</a:t>
+            </a:r>
+            <a:r>
+              <a:rPr lang="en-US" sz="1200" kern="1200" dirty="0" smtClean="0">
+                <a:solidFill>
+                  <a:schemeClr val="tx1"/>
+                </a:solidFill>
+                <a:effectLst/>
+                <a:latin typeface="+mn-lt"/>
+                <a:ea typeface="+mn-ea"/>
+                <a:cs typeface="+mn-cs"/>
+              </a:rPr>
+              <a:t> </a:t>
+            </a:r>
+            <a:r>
+              <a:rPr lang="en-US" sz="1200" kern="1200" dirty="0" err="1" smtClean="0">
+                <a:solidFill>
+                  <a:schemeClr val="tx1"/>
+                </a:solidFill>
+                <a:effectLst/>
+                <a:latin typeface="+mn-lt"/>
+                <a:ea typeface="+mn-ea"/>
+                <a:cs typeface="+mn-cs"/>
+              </a:rPr>
+              <a:t>откриване</a:t>
+            </a:r>
+            <a:r>
+              <a:rPr lang="en-US" sz="1200" kern="1200" dirty="0" smtClean="0">
+                <a:solidFill>
+                  <a:schemeClr val="tx1"/>
+                </a:solidFill>
+                <a:effectLst/>
+                <a:latin typeface="+mn-lt"/>
+                <a:ea typeface="+mn-ea"/>
+                <a:cs typeface="+mn-cs"/>
+              </a:rPr>
+              <a:t> </a:t>
+            </a:r>
+            <a:r>
+              <a:rPr lang="en-US" sz="1200" kern="1200" dirty="0" err="1" smtClean="0">
+                <a:solidFill>
+                  <a:schemeClr val="tx1"/>
+                </a:solidFill>
+                <a:effectLst/>
+                <a:latin typeface="+mn-lt"/>
+                <a:ea typeface="+mn-ea"/>
+                <a:cs typeface="+mn-cs"/>
+              </a:rPr>
+              <a:t>на</a:t>
+            </a:r>
+            <a:r>
+              <a:rPr lang="en-US" sz="1200" kern="1200" dirty="0" smtClean="0">
+                <a:solidFill>
+                  <a:schemeClr val="tx1"/>
+                </a:solidFill>
+                <a:effectLst/>
+                <a:latin typeface="+mn-lt"/>
+                <a:ea typeface="+mn-ea"/>
+                <a:cs typeface="+mn-cs"/>
+              </a:rPr>
+              <a:t> </a:t>
+            </a:r>
+            <a:r>
+              <a:rPr lang="en-US" sz="1200" kern="1200" dirty="0" err="1" smtClean="0">
+                <a:solidFill>
+                  <a:schemeClr val="tx1"/>
+                </a:solidFill>
+                <a:effectLst/>
+                <a:latin typeface="+mn-lt"/>
+                <a:ea typeface="+mn-ea"/>
+                <a:cs typeface="+mn-cs"/>
+              </a:rPr>
+              <a:t>движение</a:t>
+            </a:r>
+            <a:r>
+              <a:rPr lang="en-US" sz="1200" kern="1200" dirty="0" smtClean="0">
+                <a:solidFill>
+                  <a:schemeClr val="tx1"/>
+                </a:solidFill>
+                <a:effectLst/>
+                <a:latin typeface="+mn-lt"/>
+                <a:ea typeface="+mn-ea"/>
+                <a:cs typeface="+mn-cs"/>
+              </a:rPr>
+              <a:t>, </a:t>
+            </a:r>
+            <a:r>
+              <a:rPr lang="en-US" sz="1200" kern="1200" dirty="0" err="1" smtClean="0">
+                <a:solidFill>
+                  <a:schemeClr val="tx1"/>
+                </a:solidFill>
+                <a:effectLst/>
+                <a:latin typeface="+mn-lt"/>
+                <a:ea typeface="+mn-ea"/>
+                <a:cs typeface="+mn-cs"/>
+              </a:rPr>
+              <a:t>реализирано</a:t>
+            </a:r>
+            <a:r>
+              <a:rPr lang="en-US" sz="1200" kern="1200" dirty="0" smtClean="0">
+                <a:solidFill>
+                  <a:schemeClr val="tx1"/>
+                </a:solidFill>
+                <a:effectLst/>
+                <a:latin typeface="+mn-lt"/>
+                <a:ea typeface="+mn-ea"/>
+                <a:cs typeface="+mn-cs"/>
+              </a:rPr>
+              <a:t> с Django и </a:t>
+            </a:r>
+            <a:r>
+              <a:rPr lang="en-US" sz="1200" kern="1200" dirty="0" err="1" smtClean="0">
+                <a:solidFill>
+                  <a:schemeClr val="tx1"/>
+                </a:solidFill>
+                <a:effectLst/>
+                <a:latin typeface="+mn-lt"/>
+                <a:ea typeface="+mn-ea"/>
+                <a:cs typeface="+mn-cs"/>
+              </a:rPr>
+              <a:t>OpenCV</a:t>
+            </a:r>
+            <a:r>
+              <a:rPr lang="en-US" sz="1200" kern="1200" dirty="0" smtClean="0">
+                <a:solidFill>
+                  <a:schemeClr val="tx1"/>
+                </a:solidFill>
+                <a:effectLst/>
+                <a:latin typeface="+mn-lt"/>
+                <a:ea typeface="+mn-ea"/>
+                <a:cs typeface="+mn-cs"/>
+              </a:rPr>
+              <a:t>.</a:t>
+            </a:r>
+            <a:endParaRPr lang="bg-BG" sz="1200" kern="1200" smtClean="0">
+              <a:solidFill>
+                <a:schemeClr val="tx1"/>
+              </a:solidFill>
+              <a:effectLst/>
+              <a:latin typeface="+mn-lt"/>
+              <a:ea typeface="+mn-ea"/>
+              <a:cs typeface="+mn-cs"/>
+            </a:endParaRPr>
+          </a:p>
+          <a:p>
             <a:endParaRPr lang="en-US" dirty="0">
               <a:highlight>
                 <a:srgbClr val="606060"/>
@@ -2290,13 +2707,7 @@
               <a:rPr lang="ru-RU" b="1" dirty="0" smtClean="0">
                 <a:effectLst/>
               </a:rPr>
-              <a:t>Claude </a:t>
-            </a:r>
-            <a:r>
-              <a:rPr lang="ru-RU" b="1" dirty="0" smtClean="0">
-                <a:effectLst/>
-              </a:rPr>
-              <a:t>responded: GDPR е европейски закон за защита на личните данни.</a:t>
+              <a:t>Claude responded: GDPR е европейски закон за защита на личните данни.</a:t>
             </a:r>
           </a:p>
           <a:p>

--- a/DR/Защита_Костадин_final (1).pptx
+++ b/DR/Защита_Костадин_final (1).pptx
@@ -3864,14 +3864,534 @@
           <a:lstStyle/>
           <a:p>
             <a:r>
-              <a:rPr lang="en-US">
+              <a:rPr lang="en-US" dirty="0" err="1" smtClean="0">
                 <a:highlight>
                   <a:srgbClr val="FFFFFF"/>
                 </a:highlight>
               </a:rPr>
-              <a:t>Камерата подава кадри към Django, OpenCV ги обработва и резултатът се предава към браузъра чрез MJPEG. При засечено движение събитието се записва автоматично в MariaDB. Целият процес се осъществява с минимално закъснение и без намеса от страна на потребителя.</a:t>
-            </a:r>
-            <a:endParaRPr lang="en-US">
+              <a:t>Камерата</a:t>
+            </a:r>
+            <a:r>
+              <a:rPr lang="en-US" dirty="0" smtClean="0">
+                <a:highlight>
+                  <a:srgbClr val="FFFFFF"/>
+                </a:highlight>
+              </a:rPr>
+              <a:t> </a:t>
+            </a:r>
+            <a:r>
+              <a:rPr lang="en-US" dirty="0" err="1" smtClean="0">
+                <a:highlight>
+                  <a:srgbClr val="FFFFFF"/>
+                </a:highlight>
+              </a:rPr>
+              <a:t>подава</a:t>
+            </a:r>
+            <a:r>
+              <a:rPr lang="en-US" dirty="0" smtClean="0">
+                <a:highlight>
+                  <a:srgbClr val="FFFFFF"/>
+                </a:highlight>
+              </a:rPr>
+              <a:t> </a:t>
+            </a:r>
+            <a:r>
+              <a:rPr lang="en-US" dirty="0" err="1" smtClean="0">
+                <a:highlight>
+                  <a:srgbClr val="FFFFFF"/>
+                </a:highlight>
+              </a:rPr>
+              <a:t>кадри</a:t>
+            </a:r>
+            <a:r>
+              <a:rPr lang="en-US" dirty="0" smtClean="0">
+                <a:highlight>
+                  <a:srgbClr val="FFFFFF"/>
+                </a:highlight>
+              </a:rPr>
+              <a:t> </a:t>
+            </a:r>
+            <a:r>
+              <a:rPr lang="en-US" dirty="0" err="1" smtClean="0">
+                <a:highlight>
+                  <a:srgbClr val="FFFFFF"/>
+                </a:highlight>
+              </a:rPr>
+              <a:t>към</a:t>
+            </a:r>
+            <a:r>
+              <a:rPr lang="en-US" dirty="0" smtClean="0">
+                <a:highlight>
+                  <a:srgbClr val="FFFFFF"/>
+                </a:highlight>
+              </a:rPr>
+              <a:t> Django, </a:t>
+            </a:r>
+            <a:r>
+              <a:rPr lang="en-US" dirty="0" err="1" smtClean="0">
+                <a:highlight>
+                  <a:srgbClr val="FFFFFF"/>
+                </a:highlight>
+              </a:rPr>
+              <a:t>OpenCV</a:t>
+            </a:r>
+            <a:r>
+              <a:rPr lang="en-US" dirty="0" smtClean="0">
+                <a:highlight>
+                  <a:srgbClr val="FFFFFF"/>
+                </a:highlight>
+              </a:rPr>
+              <a:t> </a:t>
+            </a:r>
+            <a:r>
+              <a:rPr lang="en-US" dirty="0" err="1" smtClean="0">
+                <a:highlight>
+                  <a:srgbClr val="FFFFFF"/>
+                </a:highlight>
+              </a:rPr>
+              <a:t>ги</a:t>
+            </a:r>
+            <a:r>
+              <a:rPr lang="en-US" dirty="0" smtClean="0">
+                <a:highlight>
+                  <a:srgbClr val="FFFFFF"/>
+                </a:highlight>
+              </a:rPr>
+              <a:t> </a:t>
+            </a:r>
+            <a:r>
+              <a:rPr lang="en-US" dirty="0" err="1" smtClean="0">
+                <a:highlight>
+                  <a:srgbClr val="FFFFFF"/>
+                </a:highlight>
+              </a:rPr>
+              <a:t>обработва</a:t>
+            </a:r>
+            <a:r>
+              <a:rPr lang="en-US" dirty="0" smtClean="0">
+                <a:highlight>
+                  <a:srgbClr val="FFFFFF"/>
+                </a:highlight>
+              </a:rPr>
+              <a:t> и </a:t>
+            </a:r>
+            <a:r>
+              <a:rPr lang="en-US" dirty="0" err="1" smtClean="0">
+                <a:highlight>
+                  <a:srgbClr val="FFFFFF"/>
+                </a:highlight>
+              </a:rPr>
+              <a:t>резултатът</a:t>
+            </a:r>
+            <a:r>
+              <a:rPr lang="en-US" dirty="0" smtClean="0">
+                <a:highlight>
+                  <a:srgbClr val="FFFFFF"/>
+                </a:highlight>
+              </a:rPr>
+              <a:t> </a:t>
+            </a:r>
+            <a:r>
+              <a:rPr lang="en-US" dirty="0" err="1" smtClean="0">
+                <a:highlight>
+                  <a:srgbClr val="FFFFFF"/>
+                </a:highlight>
+              </a:rPr>
+              <a:t>се</a:t>
+            </a:r>
+            <a:r>
+              <a:rPr lang="en-US" dirty="0" smtClean="0">
+                <a:highlight>
+                  <a:srgbClr val="FFFFFF"/>
+                </a:highlight>
+              </a:rPr>
+              <a:t> </a:t>
+            </a:r>
+            <a:r>
+              <a:rPr lang="en-US" dirty="0" err="1" smtClean="0">
+                <a:highlight>
+                  <a:srgbClr val="FFFFFF"/>
+                </a:highlight>
+              </a:rPr>
+              <a:t>предава</a:t>
+            </a:r>
+            <a:r>
+              <a:rPr lang="en-US" dirty="0" smtClean="0">
+                <a:highlight>
+                  <a:srgbClr val="FFFFFF"/>
+                </a:highlight>
+              </a:rPr>
+              <a:t> </a:t>
+            </a:r>
+            <a:r>
+              <a:rPr lang="en-US" dirty="0" err="1" smtClean="0">
+                <a:highlight>
+                  <a:srgbClr val="FFFFFF"/>
+                </a:highlight>
+              </a:rPr>
+              <a:t>към</a:t>
+            </a:r>
+            <a:r>
+              <a:rPr lang="en-US" dirty="0" smtClean="0">
+                <a:highlight>
+                  <a:srgbClr val="FFFFFF"/>
+                </a:highlight>
+              </a:rPr>
+              <a:t> </a:t>
+            </a:r>
+            <a:r>
+              <a:rPr lang="en-US" dirty="0" err="1" smtClean="0">
+                <a:highlight>
+                  <a:srgbClr val="FFFFFF"/>
+                </a:highlight>
+              </a:rPr>
+              <a:t>браузъра</a:t>
+            </a:r>
+            <a:r>
+              <a:rPr lang="en-US" dirty="0" smtClean="0">
+                <a:highlight>
+                  <a:srgbClr val="FFFFFF"/>
+                </a:highlight>
+              </a:rPr>
+              <a:t> </a:t>
+            </a:r>
+            <a:r>
+              <a:rPr lang="en-US" dirty="0" err="1" smtClean="0">
+                <a:highlight>
+                  <a:srgbClr val="FFFFFF"/>
+                </a:highlight>
+              </a:rPr>
+              <a:t>чрез</a:t>
+            </a:r>
+            <a:r>
+              <a:rPr lang="en-US" dirty="0" smtClean="0">
+                <a:highlight>
+                  <a:srgbClr val="FFFFFF"/>
+                </a:highlight>
+              </a:rPr>
+              <a:t> MJPEG. </a:t>
+            </a:r>
+            <a:r>
+              <a:rPr lang="en-US" dirty="0" err="1" smtClean="0">
+                <a:highlight>
+                  <a:srgbClr val="FFFFFF"/>
+                </a:highlight>
+              </a:rPr>
+              <a:t>При</a:t>
+            </a:r>
+            <a:r>
+              <a:rPr lang="en-US" dirty="0" smtClean="0">
+                <a:highlight>
+                  <a:srgbClr val="FFFFFF"/>
+                </a:highlight>
+              </a:rPr>
+              <a:t> </a:t>
+            </a:r>
+            <a:r>
+              <a:rPr lang="en-US" dirty="0" err="1" smtClean="0">
+                <a:highlight>
+                  <a:srgbClr val="FFFFFF"/>
+                </a:highlight>
+              </a:rPr>
+              <a:t>засечено</a:t>
+            </a:r>
+            <a:r>
+              <a:rPr lang="en-US" dirty="0" smtClean="0">
+                <a:highlight>
+                  <a:srgbClr val="FFFFFF"/>
+                </a:highlight>
+              </a:rPr>
+              <a:t> </a:t>
+            </a:r>
+            <a:r>
+              <a:rPr lang="en-US" dirty="0" err="1" smtClean="0">
+                <a:highlight>
+                  <a:srgbClr val="FFFFFF"/>
+                </a:highlight>
+              </a:rPr>
+              <a:t>движение</a:t>
+            </a:r>
+            <a:r>
+              <a:rPr lang="en-US" dirty="0" smtClean="0">
+                <a:highlight>
+                  <a:srgbClr val="FFFFFF"/>
+                </a:highlight>
+              </a:rPr>
+              <a:t> </a:t>
+            </a:r>
+            <a:r>
+              <a:rPr lang="en-US" dirty="0" err="1" smtClean="0">
+                <a:highlight>
+                  <a:srgbClr val="FFFFFF"/>
+                </a:highlight>
+              </a:rPr>
+              <a:t>събитието</a:t>
+            </a:r>
+            <a:r>
+              <a:rPr lang="en-US" dirty="0" smtClean="0">
+                <a:highlight>
+                  <a:srgbClr val="FFFFFF"/>
+                </a:highlight>
+              </a:rPr>
+              <a:t> </a:t>
+            </a:r>
+            <a:r>
+              <a:rPr lang="en-US" dirty="0" err="1" smtClean="0">
+                <a:highlight>
+                  <a:srgbClr val="FFFFFF"/>
+                </a:highlight>
+              </a:rPr>
+              <a:t>се</a:t>
+            </a:r>
+            <a:r>
+              <a:rPr lang="en-US" dirty="0" smtClean="0">
+                <a:highlight>
+                  <a:srgbClr val="FFFFFF"/>
+                </a:highlight>
+              </a:rPr>
+              <a:t> </a:t>
+            </a:r>
+            <a:r>
+              <a:rPr lang="en-US" dirty="0" err="1" smtClean="0">
+                <a:highlight>
+                  <a:srgbClr val="FFFFFF"/>
+                </a:highlight>
+              </a:rPr>
+              <a:t>записва</a:t>
+            </a:r>
+            <a:r>
+              <a:rPr lang="en-US" dirty="0" smtClean="0">
+                <a:highlight>
+                  <a:srgbClr val="FFFFFF"/>
+                </a:highlight>
+              </a:rPr>
+              <a:t> </a:t>
+            </a:r>
+            <a:r>
+              <a:rPr lang="en-US" dirty="0" err="1" smtClean="0">
+                <a:highlight>
+                  <a:srgbClr val="FFFFFF"/>
+                </a:highlight>
+              </a:rPr>
+              <a:t>автоматично</a:t>
+            </a:r>
+            <a:r>
+              <a:rPr lang="en-US" dirty="0" smtClean="0">
+                <a:highlight>
+                  <a:srgbClr val="FFFFFF"/>
+                </a:highlight>
+              </a:rPr>
+              <a:t> в </a:t>
+            </a:r>
+            <a:r>
+              <a:rPr lang="en-US" dirty="0" err="1" smtClean="0">
+                <a:highlight>
+                  <a:srgbClr val="FFFFFF"/>
+                </a:highlight>
+              </a:rPr>
+              <a:t>MariaDB</a:t>
+            </a:r>
+            <a:r>
+              <a:rPr lang="en-US" dirty="0" smtClean="0">
+                <a:highlight>
+                  <a:srgbClr val="FFFFFF"/>
+                </a:highlight>
+              </a:rPr>
+              <a:t>. </a:t>
+            </a:r>
+            <a:r>
+              <a:rPr lang="en-US" dirty="0" err="1" smtClean="0">
+                <a:highlight>
+                  <a:srgbClr val="FFFFFF"/>
+                </a:highlight>
+              </a:rPr>
+              <a:t>Целият</a:t>
+            </a:r>
+            <a:r>
+              <a:rPr lang="en-US" dirty="0" smtClean="0">
+                <a:highlight>
+                  <a:srgbClr val="FFFFFF"/>
+                </a:highlight>
+              </a:rPr>
+              <a:t> </a:t>
+            </a:r>
+            <a:r>
+              <a:rPr lang="en-US" dirty="0" err="1" smtClean="0">
+                <a:highlight>
+                  <a:srgbClr val="FFFFFF"/>
+                </a:highlight>
+              </a:rPr>
+              <a:t>процес</a:t>
+            </a:r>
+            <a:r>
+              <a:rPr lang="en-US" dirty="0" smtClean="0">
+                <a:highlight>
+                  <a:srgbClr val="FFFFFF"/>
+                </a:highlight>
+              </a:rPr>
+              <a:t> </a:t>
+            </a:r>
+            <a:r>
+              <a:rPr lang="en-US" dirty="0" err="1" smtClean="0">
+                <a:highlight>
+                  <a:srgbClr val="FFFFFF"/>
+                </a:highlight>
+              </a:rPr>
+              <a:t>се</a:t>
+            </a:r>
+            <a:r>
+              <a:rPr lang="en-US" dirty="0" smtClean="0">
+                <a:highlight>
+                  <a:srgbClr val="FFFFFF"/>
+                </a:highlight>
+              </a:rPr>
+              <a:t> </a:t>
+            </a:r>
+            <a:r>
+              <a:rPr lang="en-US" dirty="0" err="1" smtClean="0">
+                <a:highlight>
+                  <a:srgbClr val="FFFFFF"/>
+                </a:highlight>
+              </a:rPr>
+              <a:t>осъществява</a:t>
+            </a:r>
+            <a:r>
+              <a:rPr lang="en-US" dirty="0" smtClean="0">
+                <a:highlight>
+                  <a:srgbClr val="FFFFFF"/>
+                </a:highlight>
+              </a:rPr>
+              <a:t> с </a:t>
+            </a:r>
+            <a:r>
+              <a:rPr lang="en-US" dirty="0" err="1" smtClean="0">
+                <a:highlight>
+                  <a:srgbClr val="FFFFFF"/>
+                </a:highlight>
+              </a:rPr>
+              <a:t>минимално</a:t>
+            </a:r>
+            <a:r>
+              <a:rPr lang="en-US" dirty="0" smtClean="0">
+                <a:highlight>
+                  <a:srgbClr val="FFFFFF"/>
+                </a:highlight>
+              </a:rPr>
+              <a:t> </a:t>
+            </a:r>
+            <a:r>
+              <a:rPr lang="en-US" dirty="0" err="1" smtClean="0">
+                <a:highlight>
+                  <a:srgbClr val="FFFFFF"/>
+                </a:highlight>
+              </a:rPr>
+              <a:t>закъснение</a:t>
+            </a:r>
+            <a:r>
+              <a:rPr lang="en-US" dirty="0" smtClean="0">
+                <a:highlight>
+                  <a:srgbClr val="FFFFFF"/>
+                </a:highlight>
+              </a:rPr>
+              <a:t> и </a:t>
+            </a:r>
+            <a:r>
+              <a:rPr lang="en-US" dirty="0" err="1" smtClean="0">
+                <a:highlight>
+                  <a:srgbClr val="FFFFFF"/>
+                </a:highlight>
+              </a:rPr>
+              <a:t>без</a:t>
+            </a:r>
+            <a:r>
+              <a:rPr lang="en-US" dirty="0" smtClean="0">
+                <a:highlight>
+                  <a:srgbClr val="FFFFFF"/>
+                </a:highlight>
+              </a:rPr>
+              <a:t> </a:t>
+            </a:r>
+            <a:r>
+              <a:rPr lang="en-US" dirty="0" err="1" smtClean="0">
+                <a:highlight>
+                  <a:srgbClr val="FFFFFF"/>
+                </a:highlight>
+              </a:rPr>
+              <a:t>намеса</a:t>
+            </a:r>
+            <a:r>
+              <a:rPr lang="en-US" dirty="0" smtClean="0">
+                <a:highlight>
+                  <a:srgbClr val="FFFFFF"/>
+                </a:highlight>
+              </a:rPr>
+              <a:t> </a:t>
+            </a:r>
+            <a:r>
+              <a:rPr lang="en-US" dirty="0" err="1" smtClean="0">
+                <a:highlight>
+                  <a:srgbClr val="FFFFFF"/>
+                </a:highlight>
+              </a:rPr>
+              <a:t>от</a:t>
+            </a:r>
+            <a:r>
+              <a:rPr lang="en-US" dirty="0" smtClean="0">
+                <a:highlight>
+                  <a:srgbClr val="FFFFFF"/>
+                </a:highlight>
+              </a:rPr>
+              <a:t> </a:t>
+            </a:r>
+            <a:r>
+              <a:rPr lang="en-US" dirty="0" err="1" smtClean="0">
+                <a:highlight>
+                  <a:srgbClr val="FFFFFF"/>
+                </a:highlight>
+              </a:rPr>
+              <a:t>страна</a:t>
+            </a:r>
+            <a:r>
+              <a:rPr lang="en-US" dirty="0" smtClean="0">
+                <a:highlight>
+                  <a:srgbClr val="FFFFFF"/>
+                </a:highlight>
+              </a:rPr>
+              <a:t> </a:t>
+            </a:r>
+            <a:r>
+              <a:rPr lang="en-US" dirty="0" err="1" smtClean="0">
+                <a:highlight>
+                  <a:srgbClr val="FFFFFF"/>
+                </a:highlight>
+              </a:rPr>
+              <a:t>на</a:t>
+            </a:r>
+            <a:r>
+              <a:rPr lang="en-US" dirty="0" smtClean="0">
+                <a:highlight>
+                  <a:srgbClr val="FFFFFF"/>
+                </a:highlight>
+              </a:rPr>
+              <a:t> </a:t>
+            </a:r>
+            <a:r>
+              <a:rPr lang="en-US" dirty="0" err="1" smtClean="0">
+                <a:highlight>
+                  <a:srgbClr val="FFFFFF"/>
+                </a:highlight>
+              </a:rPr>
+              <a:t>потребителя</a:t>
+            </a:r>
+            <a:r>
+              <a:rPr lang="en-US" dirty="0" smtClean="0">
+                <a:highlight>
+                  <a:srgbClr val="FFFFFF"/>
+                </a:highlight>
+              </a:rPr>
+              <a:t>.</a:t>
+            </a:r>
+            <a:endParaRPr lang="en-US" dirty="0">
               <a:highlight>
                 <a:srgbClr val="606060"/>
               </a:highlight>
